--- a/コンサルタントが知っておくべき未来年表_勉強会資料.pptx
+++ b/コンサルタントが知っておくべき未来年表_勉強会資料.pptx
@@ -6,26 +6,26 @@
   </p:sldMasterIdLst>
   <p:sldIdLst>
     <p:sldId id="256" r:id="rId7"/>
-    <p:sldId id="257" r:id="rId8"/>
-    <p:sldId id="258" r:id="rId9"/>
-    <p:sldId id="259" r:id="rId10"/>
-    <p:sldId id="260" r:id="rId11"/>
-    <p:sldId id="261" r:id="rId12"/>
-    <p:sldId id="262" r:id="rId13"/>
-    <p:sldId id="263" r:id="rId14"/>
-    <p:sldId id="264" r:id="rId15"/>
-    <p:sldId id="265" r:id="rId16"/>
-    <p:sldId id="266" r:id="rId17"/>
-    <p:sldId id="267" r:id="rId18"/>
-    <p:sldId id="268" r:id="rId19"/>
-    <p:sldId id="269" r:id="rId20"/>
-    <p:sldId id="270" r:id="rId21"/>
-    <p:sldId id="271" r:id="rId22"/>
-    <p:sldId id="272" r:id="rId23"/>
-    <p:sldId id="273" r:id="rId24"/>
-    <p:sldId id="274" r:id="rId25"/>
-    <p:sldId id="275" r:id="rId26"/>
-    <p:sldId id="276" r:id="rId27"/>
+    <p:sldId id="257" r:id="rId9"/>
+    <p:sldId id="258" r:id="rId10"/>
+    <p:sldId id="259" r:id="rId11"/>
+    <p:sldId id="260" r:id="rId12"/>
+    <p:sldId id="261" r:id="rId13"/>
+    <p:sldId id="262" r:id="rId14"/>
+    <p:sldId id="263" r:id="rId15"/>
+    <p:sldId id="264" r:id="rId16"/>
+    <p:sldId id="265" r:id="rId17"/>
+    <p:sldId id="266" r:id="rId18"/>
+    <p:sldId id="267" r:id="rId19"/>
+    <p:sldId id="268" r:id="rId20"/>
+    <p:sldId id="269" r:id="rId21"/>
+    <p:sldId id="270" r:id="rId22"/>
+    <p:sldId id="271" r:id="rId23"/>
+    <p:sldId id="272" r:id="rId24"/>
+    <p:sldId id="273" r:id="rId25"/>
+    <p:sldId id="274" r:id="rId26"/>
+    <p:sldId id="275" r:id="rId27"/>
+    <p:sldId id="276" r:id="rId28"/>
   </p:sldIdLst>
   <p:sldSz cx="9144000" cy="5143500" type="screen4x3"/>
   <p:notesSz cx="6858000" cy="9144000"/>
@@ -125,6 +125,2306 @@
     </a:lvl9pPr>
   </p:defaultTextStyle>
 </p:presentation>
+</file>
+
+<file path=ppt/notesMasters/notesMaster1.xml><?xml version="1.0" encoding="utf-8"?>
+<p:notesMaster xmlns:a="http://schemas.openxmlformats.org/drawingml/2006/main" xmlns:p="http://schemas.openxmlformats.org/presentationml/2006/main" xmlns:r="http://schemas.openxmlformats.org/officeDocument/2006/relationships">
+  <p:cSld>
+    <p:bg>
+      <p:bgRef idx="1001">
+        <a:schemeClr val="bg1"/>
+      </p:bgRef>
+    </p:bg>
+    <p:spTree>
+      <p:nvGrpSpPr>
+        <p:cNvPr id="1" name=""/>
+        <p:cNvGrpSpPr/>
+        <p:nvPr/>
+      </p:nvGrpSpPr>
+      <p:grpSpPr>
+        <a:xfrm>
+          <a:off x="0" y="0"/>
+          <a:ext cx="0" cy="0"/>
+          <a:chOff x="0" y="0"/>
+          <a:chExt cx="0" cy="0"/>
+        </a:xfrm>
+      </p:grpSpPr>
+      <p:sp>
+        <p:nvSpPr>
+          <p:cNvPr id="2" name="Header Placeholder 1"/>
+          <p:cNvSpPr>
+            <a:spLocks noGrp="1"/>
+          </p:cNvSpPr>
+          <p:nvPr>
+            <p:ph type="hdr" sz="quarter"/>
+          </p:nvPr>
+        </p:nvSpPr>
+        <p:spPr>
+          <a:xfrm>
+            <a:off x="0" y="0"/>
+            <a:ext cx="2971800" cy="457200"/>
+          </a:xfrm>
+          <a:prstGeom prst="rect">
+            <a:avLst/>
+          </a:prstGeom>
+        </p:spPr>
+        <p:txBody>
+          <a:bodyPr vert="horz" lIns="91440" tIns="45720" rIns="91440" bIns="45720" rtlCol="0"/>
+          <a:lstStyle>
+            <a:lvl1pPr algn="l">
+              <a:defRPr sz="1200"/>
+            </a:lvl1pPr>
+          </a:lstStyle>
+          <a:p>
+            <a:endParaRPr lang="en-US"/>
+          </a:p>
+        </p:txBody>
+      </p:sp>
+      <p:sp>
+        <p:nvSpPr>
+          <p:cNvPr id="3" name="Date Placeholder 2"/>
+          <p:cNvSpPr>
+            <a:spLocks noGrp="1"/>
+          </p:cNvSpPr>
+          <p:nvPr>
+            <p:ph type="dt" idx="1"/>
+          </p:nvPr>
+        </p:nvSpPr>
+        <p:spPr>
+          <a:xfrm>
+            <a:off x="3884613" y="0"/>
+            <a:ext cx="2971800" cy="457200"/>
+          </a:xfrm>
+          <a:prstGeom prst="rect">
+            <a:avLst/>
+          </a:prstGeom>
+        </p:spPr>
+        <p:txBody>
+          <a:bodyPr vert="horz" lIns="91440" tIns="45720" rIns="91440" bIns="45720" rtlCol="0"/>
+          <a:lstStyle>
+            <a:lvl1pPr algn="r">
+              <a:defRPr sz="1200"/>
+            </a:lvl1pPr>
+          </a:lstStyle>
+          <a:p>
+            <a:fld id="{0F89C1C7-3DCD-1040-A9CF-14679D8B5DDD}" type="datetimeFigureOut">
+              <a:rPr lang="en-US" smtClean="0"/>
+              <a:t>10/17/16</a:t>
+            </a:fld>
+            <a:endParaRPr lang="en-US"/>
+          </a:p>
+        </p:txBody>
+      </p:sp>
+      <p:sp>
+        <p:nvSpPr>
+          <p:cNvPr id="4" name="Slide Image Placeholder 3"/>
+          <p:cNvSpPr>
+            <a:spLocks noGrp="1" noRot="1" noChangeAspect="1"/>
+          </p:cNvSpPr>
+          <p:nvPr>
+            <p:ph type="sldImg" idx="2"/>
+          </p:nvPr>
+        </p:nvSpPr>
+        <p:spPr>
+          <a:xfrm>
+            <a:off x="1143000" y="685800"/>
+            <a:ext cx="4572000" cy="3429000"/>
+          </a:xfrm>
+          <a:prstGeom prst="rect">
+            <a:avLst/>
+          </a:prstGeom>
+          <a:noFill/>
+          <a:ln w="12700">
+            <a:solidFill>
+              <a:prstClr val="black"/>
+            </a:solidFill>
+          </a:ln>
+        </p:spPr>
+        <p:txBody>
+          <a:bodyPr vert="horz" lIns="91440" tIns="45720" rIns="91440" bIns="45720" rtlCol="0" anchor="ctr"/>
+          <a:lstStyle/>
+          <a:p>
+            <a:endParaRPr lang="en-US"/>
+          </a:p>
+        </p:txBody>
+      </p:sp>
+      <p:sp>
+        <p:nvSpPr>
+          <p:cNvPr id="5" name="Notes Placeholder 4"/>
+          <p:cNvSpPr>
+            <a:spLocks noGrp="1"/>
+          </p:cNvSpPr>
+          <p:nvPr>
+            <p:ph type="body" sz="quarter" idx="3"/>
+          </p:nvPr>
+        </p:nvSpPr>
+        <p:spPr>
+          <a:xfrm>
+            <a:off x="685800" y="4343400"/>
+            <a:ext cx="5486400" cy="4114800"/>
+          </a:xfrm>
+          <a:prstGeom prst="rect">
+            <a:avLst/>
+          </a:prstGeom>
+        </p:spPr>
+        <p:txBody>
+          <a:bodyPr vert="horz" lIns="91440" tIns="45720" rIns="91440" bIns="45720" rtlCol="0"/>
+          <a:lstStyle/>
+          <a:p>
+            <a:pPr lvl="0"/>
+            <a:r>
+              <a:rPr lang="en-US" smtClean="0"/>
+              <a:t>Click to edit Master text styles</a:t>
+            </a:r>
+          </a:p>
+          <a:p>
+            <a:pPr lvl="1"/>
+            <a:r>
+              <a:rPr lang="en-US" smtClean="0"/>
+              <a:t>Second level</a:t>
+            </a:r>
+          </a:p>
+          <a:p>
+            <a:pPr lvl="2"/>
+            <a:r>
+              <a:rPr lang="en-US" smtClean="0"/>
+              <a:t>Third level</a:t>
+            </a:r>
+          </a:p>
+          <a:p>
+            <a:pPr lvl="3"/>
+            <a:r>
+              <a:rPr lang="en-US" smtClean="0"/>
+              <a:t>Fourth level</a:t>
+            </a:r>
+          </a:p>
+          <a:p>
+            <a:pPr lvl="4"/>
+            <a:r>
+              <a:rPr lang="en-US" smtClean="0"/>
+              <a:t>Fifth level</a:t>
+            </a:r>
+            <a:endParaRPr lang="en-US"/>
+          </a:p>
+        </p:txBody>
+      </p:sp>
+      <p:sp>
+        <p:nvSpPr>
+          <p:cNvPr id="6" name="Footer Placeholder 5"/>
+          <p:cNvSpPr>
+            <a:spLocks noGrp="1"/>
+          </p:cNvSpPr>
+          <p:nvPr>
+            <p:ph type="ftr" sz="quarter" idx="4"/>
+          </p:nvPr>
+        </p:nvSpPr>
+        <p:spPr>
+          <a:xfrm>
+            <a:off x="0" y="8685213"/>
+            <a:ext cx="2971800" cy="457200"/>
+          </a:xfrm>
+          <a:prstGeom prst="rect">
+            <a:avLst/>
+          </a:prstGeom>
+        </p:spPr>
+        <p:txBody>
+          <a:bodyPr vert="horz" lIns="91440" tIns="45720" rIns="91440" bIns="45720" rtlCol="0" anchor="b"/>
+          <a:lstStyle>
+            <a:lvl1pPr algn="l">
+              <a:defRPr sz="1200"/>
+            </a:lvl1pPr>
+          </a:lstStyle>
+          <a:p>
+            <a:endParaRPr lang="en-US"/>
+          </a:p>
+        </p:txBody>
+      </p:sp>
+      <p:sp>
+        <p:nvSpPr>
+          <p:cNvPr id="7" name="Slide Number Placeholder 6"/>
+          <p:cNvSpPr>
+            <a:spLocks noGrp="1"/>
+          </p:cNvSpPr>
+          <p:nvPr>
+            <p:ph type="sldNum" sz="quarter" idx="5"/>
+          </p:nvPr>
+        </p:nvSpPr>
+        <p:spPr>
+          <a:xfrm>
+            <a:off x="3884613" y="8685213"/>
+            <a:ext cx="2971800" cy="457200"/>
+          </a:xfrm>
+          <a:prstGeom prst="rect">
+            <a:avLst/>
+          </a:prstGeom>
+        </p:spPr>
+        <p:txBody>
+          <a:bodyPr vert="horz" lIns="91440" tIns="45720" rIns="91440" bIns="45720" rtlCol="0" anchor="b"/>
+          <a:lstStyle>
+            <a:lvl1pPr algn="r">
+              <a:defRPr sz="1200"/>
+            </a:lvl1pPr>
+          </a:lstStyle>
+          <a:p>
+            <a:fld id="{BB5E49A5-4136-284D-997B-48E1D791AD67}" type="slidenum">
+              <a:rPr lang="en-US" smtClean="0"/>
+              <a:t>‹#›</a:t>
+            </a:fld>
+            <a:endParaRPr lang="en-US"/>
+          </a:p>
+        </p:txBody>
+      </p:sp>
+    </p:spTree>
+    <p:extLst>
+      <p:ext uri="{BB962C8B-B14F-4D97-AF65-F5344CB8AC3E}">
+        <p14:creationId xmlns:p14="http://schemas.microsoft.com/office/powerpoint/2010/main" val="2623252185"/>
+      </p:ext>
+    </p:extLst>
+  </p:cSld>
+  <p:clrMap bg1="lt1" tx1="dk1" bg2="lt2" tx2="dk2" accent1="accent1" accent2="accent2" accent3="accent3" accent4="accent4" accent5="accent5" accent6="accent6" hlink="hlink" folHlink="folHlink"/>
+  <p:notesStyle>
+    <a:lvl1pPr marL="0" algn="l" defTabSz="457200" rtl="0" eaLnBrk="1" latinLnBrk="0" hangingPunct="1">
+      <a:defRPr sz="1200" kern="1200">
+        <a:solidFill>
+          <a:schemeClr val="tx1"/>
+        </a:solidFill>
+        <a:latin typeface="+mn-lt"/>
+        <a:ea typeface="+mn-ea"/>
+        <a:cs typeface="+mn-cs"/>
+      </a:defRPr>
+    </a:lvl1pPr>
+    <a:lvl2pPr marL="457200" algn="l" defTabSz="457200" rtl="0" eaLnBrk="1" latinLnBrk="0" hangingPunct="1">
+      <a:defRPr sz="1200" kern="1200">
+        <a:solidFill>
+          <a:schemeClr val="tx1"/>
+        </a:solidFill>
+        <a:latin typeface="+mn-lt"/>
+        <a:ea typeface="+mn-ea"/>
+        <a:cs typeface="+mn-cs"/>
+      </a:defRPr>
+    </a:lvl2pPr>
+    <a:lvl3pPr marL="914400" algn="l" defTabSz="457200" rtl="0" eaLnBrk="1" latinLnBrk="0" hangingPunct="1">
+      <a:defRPr sz="1200" kern="1200">
+        <a:solidFill>
+          <a:schemeClr val="tx1"/>
+        </a:solidFill>
+        <a:latin typeface="+mn-lt"/>
+        <a:ea typeface="+mn-ea"/>
+        <a:cs typeface="+mn-cs"/>
+      </a:defRPr>
+    </a:lvl3pPr>
+    <a:lvl4pPr marL="1371600" algn="l" defTabSz="457200" rtl="0" eaLnBrk="1" latinLnBrk="0" hangingPunct="1">
+      <a:defRPr sz="1200" kern="1200">
+        <a:solidFill>
+          <a:schemeClr val="tx1"/>
+        </a:solidFill>
+        <a:latin typeface="+mn-lt"/>
+        <a:ea typeface="+mn-ea"/>
+        <a:cs typeface="+mn-cs"/>
+      </a:defRPr>
+    </a:lvl4pPr>
+    <a:lvl5pPr marL="1828800" algn="l" defTabSz="457200" rtl="0" eaLnBrk="1" latinLnBrk="0" hangingPunct="1">
+      <a:defRPr sz="1200" kern="1200">
+        <a:solidFill>
+          <a:schemeClr val="tx1"/>
+        </a:solidFill>
+        <a:latin typeface="+mn-lt"/>
+        <a:ea typeface="+mn-ea"/>
+        <a:cs typeface="+mn-cs"/>
+      </a:defRPr>
+    </a:lvl5pPr>
+    <a:lvl6pPr marL="2286000" algn="l" defTabSz="457200" rtl="0" eaLnBrk="1" latinLnBrk="0" hangingPunct="1">
+      <a:defRPr sz="1200" kern="1200">
+        <a:solidFill>
+          <a:schemeClr val="tx1"/>
+        </a:solidFill>
+        <a:latin typeface="+mn-lt"/>
+        <a:ea typeface="+mn-ea"/>
+        <a:cs typeface="+mn-cs"/>
+      </a:defRPr>
+    </a:lvl6pPr>
+    <a:lvl7pPr marL="2743200" algn="l" defTabSz="457200" rtl="0" eaLnBrk="1" latinLnBrk="0" hangingPunct="1">
+      <a:defRPr sz="1200" kern="1200">
+        <a:solidFill>
+          <a:schemeClr val="tx1"/>
+        </a:solidFill>
+        <a:latin typeface="+mn-lt"/>
+        <a:ea typeface="+mn-ea"/>
+        <a:cs typeface="+mn-cs"/>
+      </a:defRPr>
+    </a:lvl7pPr>
+    <a:lvl8pPr marL="3200400" algn="l" defTabSz="457200" rtl="0" eaLnBrk="1" latinLnBrk="0" hangingPunct="1">
+      <a:defRPr sz="1200" kern="1200">
+        <a:solidFill>
+          <a:schemeClr val="tx1"/>
+        </a:solidFill>
+        <a:latin typeface="+mn-lt"/>
+        <a:ea typeface="+mn-ea"/>
+        <a:cs typeface="+mn-cs"/>
+      </a:defRPr>
+    </a:lvl8pPr>
+    <a:lvl9pPr marL="3657600" algn="l" defTabSz="457200" rtl="0" eaLnBrk="1" latinLnBrk="0" hangingPunct="1">
+      <a:defRPr sz="1200" kern="1200">
+        <a:solidFill>
+          <a:schemeClr val="tx1"/>
+        </a:solidFill>
+        <a:latin typeface="+mn-lt"/>
+        <a:ea typeface="+mn-ea"/>
+        <a:cs typeface="+mn-cs"/>
+      </a:defRPr>
+    </a:lvl9pPr>
+  </p:notesStyle>
+</p:notesMaster>
+</file>
+
+<file path=ppt/notesSlides/notesSlide1.xml><?xml version="1.0" encoding="utf-8"?>
+<p:notes xmlns:a="http://schemas.openxmlformats.org/drawingml/2006/main" xmlns:p="http://schemas.openxmlformats.org/presentationml/2006/main" xmlns:r="http://schemas.openxmlformats.org/officeDocument/2006/relationships">
+  <p:cSld>
+    <p:spTree>
+      <p:nvGrpSpPr>
+        <p:cNvPr id="1" name=""/>
+        <p:cNvGrpSpPr/>
+        <p:nvPr/>
+      </p:nvGrpSpPr>
+      <p:grpSpPr>
+        <a:xfrm>
+          <a:off x="0" y="0"/>
+          <a:ext cx="0" cy="0"/>
+          <a:chOff x="0" y="0"/>
+          <a:chExt cx="0" cy="0"/>
+        </a:xfrm>
+      </p:grpSpPr>
+      <p:sp>
+        <p:nvSpPr>
+          <p:cNvPr id="2" name="Slide Image Placeholder 1"/>
+          <p:cNvSpPr>
+            <a:spLocks noGrp="1"/>
+          </p:cNvSpPr>
+          <p:nvPr>
+            <p:ph type="sldImg" idx="2"/>
+          </p:nvPr>
+        </p:nvSpPr>
+        <p:spPr/>
+      </p:sp>
+      <p:sp>
+        <p:nvSpPr>
+          <p:cNvPr id="3" name="Notes Placeholder 2"/>
+          <p:cNvSpPr>
+            <a:spLocks noGrp="1"/>
+          </p:cNvSpPr>
+          <p:nvPr>
+            <p:ph type="body" idx="3" sz="quarter"/>
+          </p:nvPr>
+        </p:nvSpPr>
+        <p:spPr/>
+        <p:txBody>
+          <a:bodyPr/>
+          <a:lstStyle/>
+          <a:p>
+            <a:r>
+              <a:t>皆さん、こんにちは。Harmonic Insightの勉強会にようこそお越しくださいました。</a:t>
+            </a:r>
+          </a:p>
+          <a:p>
+            <a:r>
+              <a:t>本日は「コンサルタントが知っておくべき未来年表 2025年から2050年」というテーマでお話しします。</a:t>
+            </a:r>
+          </a:p>
+          <a:p>
+            <a:r>
+              <a:t>クライアントへのロードマップ策定や中長期計画の提案に、この未来予測データをどう活かすかを一緒に学んでいきましょう。</a:t>
+            </a:r>
+          </a:p>
+          <a:p>
+            <a:r>
+              <a:t>約40分の勉強会です。どうぞ最後までお付き合いください。</a:t>
+            </a:r>
+          </a:p>
+        </p:txBody>
+      </p:sp>
+      <p:sp>
+        <p:nvSpPr>
+          <p:cNvPr id="4" name="Slide Number Placeholder 3"/>
+          <p:cNvSpPr>
+            <a:spLocks noGrp="1"/>
+          </p:cNvSpPr>
+          <p:nvPr>
+            <p:ph type="sldNum" idx="5" sz="quarter"/>
+          </p:nvPr>
+        </p:nvSpPr>
+        <p:spPr/>
+      </p:sp>
+    </p:spTree>
+  </p:cSld>
+  <p:clrMapOvr>
+    <a:masterClrMapping/>
+  </p:clrMapOvr>
+</p:notes>
+</file>
+
+<file path=ppt/notesSlides/notesSlide10.xml><?xml version="1.0" encoding="utf-8"?>
+<p:notes xmlns:a="http://schemas.openxmlformats.org/drawingml/2006/main" xmlns:p="http://schemas.openxmlformats.org/presentationml/2006/main" xmlns:r="http://schemas.openxmlformats.org/officeDocument/2006/relationships">
+  <p:cSld>
+    <p:spTree>
+      <p:nvGrpSpPr>
+        <p:cNvPr id="1" name=""/>
+        <p:cNvGrpSpPr/>
+        <p:nvPr/>
+      </p:nvGrpSpPr>
+      <p:grpSpPr>
+        <a:xfrm>
+          <a:off x="0" y="0"/>
+          <a:ext cx="0" cy="0"/>
+          <a:chOff x="0" y="0"/>
+          <a:chExt cx="0" cy="0"/>
+        </a:xfrm>
+      </p:grpSpPr>
+      <p:sp>
+        <p:nvSpPr>
+          <p:cNvPr id="2" name="Slide Image Placeholder 1"/>
+          <p:cNvSpPr>
+            <a:spLocks noGrp="1"/>
+          </p:cNvSpPr>
+          <p:nvPr>
+            <p:ph type="sldImg" idx="2"/>
+          </p:nvPr>
+        </p:nvSpPr>
+        <p:spPr/>
+      </p:sp>
+      <p:sp>
+        <p:nvSpPr>
+          <p:cNvPr id="3" name="Notes Placeholder 2"/>
+          <p:cNvSpPr>
+            <a:spLocks noGrp="1"/>
+          </p:cNvSpPr>
+          <p:nvPr>
+            <p:ph type="body" idx="3" sz="quarter"/>
+          </p:nvPr>
+        </p:nvSpPr>
+        <p:spPr/>
+        <p:txBody>
+          <a:bodyPr/>
+          <a:lstStyle/>
+          <a:p>
+            <a:r>
+              <a:t>地域格差の拡大予測です。東京圏と地方圏の格差は2.7倍に広がると予測されています。</a:t>
+            </a:r>
+          </a:p>
+          <a:p>
+            <a:r>
+              <a:t>東京圏は人口が43%減少しますが、平均年収は1,200万円でAI活用度は95%。</a:t>
+            </a:r>
+          </a:p>
+          <a:p>
+            <a:r>
+              <a:t>一方、地方圏は26%の人口減少で、平均年収は450万円、AI活用度はわずか40%です。</a:t>
+            </a:r>
+          </a:p>
+          <a:p>
+            <a:r>
+              <a:t>左下のコンサルへの示唆にある通り、クライアントの所在地域によってDX提案の内容を変える必要があります。</a:t>
+            </a:r>
+          </a:p>
+          <a:p>
+            <a:r>
+              <a:t>そして右下の提案のポイントが重要です。地方こそAI活用度の伸びしろが大きい。現状40%のところを潜在的に80%まで引き上げられる可能性があります。</a:t>
+            </a:r>
+          </a:p>
+          <a:p>
+            <a:r>
+              <a:t>つまり、地方のクライアントへのAI・DX提案は、むしろビジネスチャンスが大きいと言えます。</a:t>
+            </a:r>
+          </a:p>
+        </p:txBody>
+      </p:sp>
+      <p:sp>
+        <p:nvSpPr>
+          <p:cNvPr id="4" name="Slide Number Placeholder 3"/>
+          <p:cNvSpPr>
+            <a:spLocks noGrp="1"/>
+          </p:cNvSpPr>
+          <p:nvPr>
+            <p:ph type="sldNum" idx="5" sz="quarter"/>
+          </p:nvPr>
+        </p:nvSpPr>
+        <p:spPr/>
+      </p:sp>
+    </p:spTree>
+  </p:cSld>
+  <p:clrMapOvr>
+    <a:masterClrMapping/>
+  </p:clrMapOvr>
+</p:notes>
+</file>
+
+<file path=ppt/notesSlides/notesSlide11.xml><?xml version="1.0" encoding="utf-8"?>
+<p:notes xmlns:a="http://schemas.openxmlformats.org/drawingml/2006/main" xmlns:p="http://schemas.openxmlformats.org/presentationml/2006/main" xmlns:r="http://schemas.openxmlformats.org/officeDocument/2006/relationships">
+  <p:cSld>
+    <p:spTree>
+      <p:nvGrpSpPr>
+        <p:cNvPr id="1" name=""/>
+        <p:cNvGrpSpPr/>
+        <p:nvPr/>
+      </p:nvGrpSpPr>
+      <p:grpSpPr>
+        <a:xfrm>
+          <a:off x="0" y="0"/>
+          <a:ext cx="0" cy="0"/>
+          <a:chOff x="0" y="0"/>
+          <a:chExt cx="0" cy="0"/>
+        </a:xfrm>
+      </p:grpSpPr>
+      <p:sp>
+        <p:nvSpPr>
+          <p:cNvPr id="2" name="Slide Image Placeholder 1"/>
+          <p:cNvSpPr>
+            <a:spLocks noGrp="1"/>
+          </p:cNvSpPr>
+          <p:nvPr>
+            <p:ph type="sldImg" idx="2"/>
+          </p:nvPr>
+        </p:nvSpPr>
+        <p:spPr/>
+      </p:sp>
+      <p:sp>
+        <p:nvSpPr>
+          <p:cNvPr id="3" name="Notes Placeholder 2"/>
+          <p:cNvSpPr>
+            <a:spLocks noGrp="1"/>
+          </p:cNvSpPr>
+          <p:nvPr>
+            <p:ph type="body" idx="3" sz="quarter"/>
+          </p:nvPr>
+        </p:nvSpPr>
+        <p:spPr/>
+        <p:txBody>
+          <a:bodyPr/>
+          <a:lstStyle/>
+          <a:p>
+            <a:r>
+              <a:t>世代別の人口と影響力の推移を見ていきます。</a:t>
+            </a:r>
+          </a:p>
+          <a:p>
+            <a:r>
+              <a:t>α世代は2020年以降生まれのAIネイティブ世代。2050年には社会を主導する世代になります。</a:t>
+            </a:r>
+          </a:p>
+          <a:p>
+            <a:r>
+              <a:t>Z世代は現在社会の中核であり、デジタル変革と価値観の多様化を牽引しています。</a:t>
+            </a:r>
+          </a:p>
+          <a:p>
+            <a:r>
+              <a:t>ミレニアル世代は2030年には経営層の主力。ワークライフバランスと実用主義が特徴です。</a:t>
+            </a:r>
+          </a:p>
+          <a:p>
+            <a:r>
+              <a:t>X世代は引退準備に入りますが、豊富な知恵を次世代に継承する役割を担います。</a:t>
+            </a:r>
+          </a:p>
+          <a:p>
+            <a:r>
+              <a:t>ベビーブーマーは後期高齢期ですが、100歳現役時代を迎え、経験と伝統の価値を守ります。</a:t>
+            </a:r>
+          </a:p>
+          <a:p>
+            <a:r>
+              <a:t>下のメッセージが実務のポイントです。2030年の意思決定者はミレニアル世代です。ワークライフバランスとデジタルを重視した提案が最も効果的です。</a:t>
+            </a:r>
+          </a:p>
+        </p:txBody>
+      </p:sp>
+      <p:sp>
+        <p:nvSpPr>
+          <p:cNvPr id="4" name="Slide Number Placeholder 3"/>
+          <p:cNvSpPr>
+            <a:spLocks noGrp="1"/>
+          </p:cNvSpPr>
+          <p:nvPr>
+            <p:ph type="sldNum" idx="5" sz="quarter"/>
+          </p:nvPr>
+        </p:nvSpPr>
+        <p:spPr/>
+      </p:sp>
+    </p:spTree>
+  </p:cSld>
+  <p:clrMapOvr>
+    <a:masterClrMapping/>
+  </p:clrMapOvr>
+</p:notes>
+</file>
+
+<file path=ppt/notesSlides/notesSlide12.xml><?xml version="1.0" encoding="utf-8"?>
+<p:notes xmlns:a="http://schemas.openxmlformats.org/drawingml/2006/main" xmlns:p="http://schemas.openxmlformats.org/presentationml/2006/main" xmlns:r="http://schemas.openxmlformats.org/officeDocument/2006/relationships">
+  <p:cSld>
+    <p:spTree>
+      <p:nvGrpSpPr>
+        <p:cNvPr id="1" name=""/>
+        <p:cNvGrpSpPr/>
+        <p:nvPr/>
+      </p:nvGrpSpPr>
+      <p:grpSpPr>
+        <a:xfrm>
+          <a:off x="0" y="0"/>
+          <a:ext cx="0" cy="0"/>
+          <a:chOff x="0" y="0"/>
+          <a:chExt cx="0" cy="0"/>
+        </a:xfrm>
+      </p:grpSpPr>
+      <p:sp>
+        <p:nvSpPr>
+          <p:cNvPr id="2" name="Slide Image Placeholder 1"/>
+          <p:cNvSpPr>
+            <a:spLocks noGrp="1"/>
+          </p:cNvSpPr>
+          <p:nvPr>
+            <p:ph type="sldImg" idx="2"/>
+          </p:nvPr>
+        </p:nvSpPr>
+        <p:spPr/>
+      </p:sp>
+      <p:sp>
+        <p:nvSpPr>
+          <p:cNvPr id="3" name="Notes Placeholder 2"/>
+          <p:cNvSpPr>
+            <a:spLocks noGrp="1"/>
+          </p:cNvSpPr>
+          <p:nvPr>
+            <p:ph type="body" idx="3" sz="quarter"/>
+          </p:nvPr>
+        </p:nvSpPr>
+        <p:spPr/>
+        <p:txBody>
+          <a:bodyPr/>
+          <a:lstStyle/>
+          <a:p>
+            <a:r>
+              <a:t>セクション3では、生活と社会の大変容について見ていきます。</a:t>
+            </a:r>
+          </a:p>
+          <a:p>
+            <a:r>
+              <a:t>食・住・医療・教育など、生活のあらゆる領域が劇的に変わります。</a:t>
+            </a:r>
+          </a:p>
+          <a:p>
+            <a:r>
+              <a:t>これらの変化は、コンサルタントが企業への提案だけでなく、個人のキャリア相談や政策提言にも活用できる重要な情報です。</a:t>
+            </a:r>
+          </a:p>
+        </p:txBody>
+      </p:sp>
+      <p:sp>
+        <p:nvSpPr>
+          <p:cNvPr id="4" name="Slide Number Placeholder 3"/>
+          <p:cNvSpPr>
+            <a:spLocks noGrp="1"/>
+          </p:cNvSpPr>
+          <p:nvPr>
+            <p:ph type="sldNum" idx="5" sz="quarter"/>
+          </p:nvPr>
+        </p:nvSpPr>
+        <p:spPr/>
+      </p:sp>
+    </p:spTree>
+  </p:cSld>
+  <p:clrMapOvr>
+    <a:masterClrMapping/>
+  </p:clrMapOvr>
+</p:notes>
+</file>
+
+<file path=ppt/notesSlides/notesSlide13.xml><?xml version="1.0" encoding="utf-8"?>
+<p:notes xmlns:a="http://schemas.openxmlformats.org/drawingml/2006/main" xmlns:p="http://schemas.openxmlformats.org/presentationml/2006/main" xmlns:r="http://schemas.openxmlformats.org/officeDocument/2006/relationships">
+  <p:cSld>
+    <p:spTree>
+      <p:nvGrpSpPr>
+        <p:cNvPr id="1" name=""/>
+        <p:cNvGrpSpPr/>
+        <p:nvPr/>
+      </p:nvGrpSpPr>
+      <p:grpSpPr>
+        <a:xfrm>
+          <a:off x="0" y="0"/>
+          <a:ext cx="0" cy="0"/>
+          <a:chOff x="0" y="0"/>
+          <a:chExt cx="0" cy="0"/>
+        </a:xfrm>
+      </p:grpSpPr>
+      <p:sp>
+        <p:nvSpPr>
+          <p:cNvPr id="2" name="Slide Image Placeholder 1"/>
+          <p:cNvSpPr>
+            <a:spLocks noGrp="1"/>
+          </p:cNvSpPr>
+          <p:nvPr>
+            <p:ph type="sldImg" idx="2"/>
+          </p:nvPr>
+        </p:nvSpPr>
+        <p:spPr/>
+      </p:sp>
+      <p:sp>
+        <p:nvSpPr>
+          <p:cNvPr id="3" name="Notes Placeholder 2"/>
+          <p:cNvSpPr>
+            <a:spLocks noGrp="1"/>
+          </p:cNvSpPr>
+          <p:nvPr>
+            <p:ph type="body" idx="3" sz="quarter"/>
+          </p:nvPr>
+        </p:nvSpPr>
+        <p:spPr/>
+        <p:txBody>
+          <a:bodyPr/>
+          <a:lstStyle/>
+          <a:p>
+            <a:r>
+              <a:t>6つの生活カテゴリ別に、現在と2050年の変化をまとめています。</a:t>
+            </a:r>
+          </a:p>
+          <a:p>
+            <a:r>
+              <a:t>食生活では、食費が階級社会化し格差が3倍に拡大。米の価格は倍増し、水の取引市場まで確立されます。</a:t>
+            </a:r>
+          </a:p>
+          <a:p>
+            <a:r>
+              <a:t>住環境は空き家800万戸から所有概念の消失へ。住居格差は10倍に広がります。</a:t>
+            </a:r>
+          </a:p>
+          <a:p>
+            <a:r>
+              <a:t>働き方は終身雇用30%から完全実力主義社会へ。創造性こそが労働価値になります。</a:t>
+            </a:r>
+          </a:p>
+          <a:p>
+            <a:r>
+              <a:t>健康・医療は平均寿命90歳、AI診断100%の時代。医療費は48兆円から大幅に増加します。</a:t>
+            </a:r>
+          </a:p>
+          <a:p>
+            <a:r>
+              <a:t>教育は大学機能の低下から教育階級社会の完成へ。最終的には脳への直接学習も研究が進みます。</a:t>
+            </a:r>
+          </a:p>
+          <a:p>
+            <a:r>
+              <a:t>お金・資産では格差5倍から固定化へ。個人の価値が直接通貨化される世界が来ます。</a:t>
+            </a:r>
+          </a:p>
+          <a:p>
+            <a:r>
+              <a:t>コンサルタントとしては、クライアント企業の従業員がこうした変化にどう対応すべきか、包括的な提案ができるようになります。</a:t>
+            </a:r>
+          </a:p>
+        </p:txBody>
+      </p:sp>
+      <p:sp>
+        <p:nvSpPr>
+          <p:cNvPr id="4" name="Slide Number Placeholder 3"/>
+          <p:cNvSpPr>
+            <a:spLocks noGrp="1"/>
+          </p:cNvSpPr>
+          <p:nvPr>
+            <p:ph type="sldNum" idx="5" sz="quarter"/>
+          </p:nvPr>
+        </p:nvSpPr>
+        <p:spPr/>
+      </p:sp>
+    </p:spTree>
+  </p:cSld>
+  <p:clrMapOvr>
+    <a:masterClrMapping/>
+  </p:clrMapOvr>
+</p:notes>
+</file>
+
+<file path=ppt/notesSlides/notesSlide14.xml><?xml version="1.0" encoding="utf-8"?>
+<p:notes xmlns:a="http://schemas.openxmlformats.org/drawingml/2006/main" xmlns:p="http://schemas.openxmlformats.org/presentationml/2006/main" xmlns:r="http://schemas.openxmlformats.org/officeDocument/2006/relationships">
+  <p:cSld>
+    <p:spTree>
+      <p:nvGrpSpPr>
+        <p:cNvPr id="1" name=""/>
+        <p:cNvGrpSpPr/>
+        <p:nvPr/>
+      </p:nvGrpSpPr>
+      <p:grpSpPr>
+        <a:xfrm>
+          <a:off x="0" y="0"/>
+          <a:ext cx="0" cy="0"/>
+          <a:chOff x="0" y="0"/>
+          <a:chExt cx="0" cy="0"/>
+        </a:xfrm>
+      </p:grpSpPr>
+      <p:sp>
+        <p:nvSpPr>
+          <p:cNvPr id="2" name="Slide Image Placeholder 1"/>
+          <p:cNvSpPr>
+            <a:spLocks noGrp="1"/>
+          </p:cNvSpPr>
+          <p:nvPr>
+            <p:ph type="sldImg" idx="2"/>
+          </p:nvPr>
+        </p:nvSpPr>
+        <p:spPr/>
+      </p:sp>
+      <p:sp>
+        <p:nvSpPr>
+          <p:cNvPr id="3" name="Notes Placeholder 2"/>
+          <p:cNvSpPr>
+            <a:spLocks noGrp="1"/>
+          </p:cNvSpPr>
+          <p:nvPr>
+            <p:ph type="body" idx="3" sz="quarter"/>
+          </p:nvPr>
+        </p:nvSpPr>
+        <p:spPr/>
+        <p:txBody>
+          <a:bodyPr/>
+          <a:lstStyle/>
+          <a:p>
+            <a:r>
+              <a:t>GDP・国際競争力の推移を見ていきます。</a:t>
+            </a:r>
+          </a:p>
+          <a:p>
+            <a:r>
+              <a:t>名目GDPは540兆円から430兆円に減少し、世界順位は3位から8位に後退します。</a:t>
+            </a:r>
+          </a:p>
+          <a:p>
+            <a:r>
+              <a:t>右側にGDP減少の主要因を4つ挙げています。人口減少23%による労働力と消費の縮小、高齢化によるAI恩恵の限定、内需の構造的な縮小、そしてインドや東南アジアなど他国の成長です。</a:t>
+            </a:r>
+          </a:p>
+          <a:p>
+            <a:r>
+              <a:t>ただし、1人当たりGDPは430万円から450万円とほぼ横ばいで、国民一人ひとりの生産性は維持されます。</a:t>
+            </a:r>
+          </a:p>
+          <a:p>
+            <a:r>
+              <a:t>そして明るい材料があります。AI・技術競争力は米中に次ぐ世界3位に上昇。労働生産性も28位から15位へ大幅に改善されます。</a:t>
+            </a:r>
+          </a:p>
+          <a:p>
+            <a:r>
+              <a:t>つまり、GDP規模は縮小しても、技術力と生産性では世界トップクラスを維持できる。この「DX推進が鍵」というメッセージが、コンサルタントの提案の核になります。</a:t>
+            </a:r>
+          </a:p>
+        </p:txBody>
+      </p:sp>
+      <p:sp>
+        <p:nvSpPr>
+          <p:cNvPr id="4" name="Slide Number Placeholder 3"/>
+          <p:cNvSpPr>
+            <a:spLocks noGrp="1"/>
+          </p:cNvSpPr>
+          <p:nvPr>
+            <p:ph type="sldNum" idx="5" sz="quarter"/>
+          </p:nvPr>
+        </p:nvSpPr>
+        <p:spPr/>
+      </p:sp>
+    </p:spTree>
+  </p:cSld>
+  <p:clrMapOvr>
+    <a:masterClrMapping/>
+  </p:clrMapOvr>
+</p:notes>
+</file>
+
+<file path=ppt/notesSlides/notesSlide15.xml><?xml version="1.0" encoding="utf-8"?>
+<p:notes xmlns:a="http://schemas.openxmlformats.org/drawingml/2006/main" xmlns:p="http://schemas.openxmlformats.org/presentationml/2006/main" xmlns:r="http://schemas.openxmlformats.org/officeDocument/2006/relationships">
+  <p:cSld>
+    <p:spTree>
+      <p:nvGrpSpPr>
+        <p:cNvPr id="1" name=""/>
+        <p:cNvGrpSpPr/>
+        <p:nvPr/>
+      </p:nvGrpSpPr>
+      <p:grpSpPr>
+        <a:xfrm>
+          <a:off x="0" y="0"/>
+          <a:ext cx="0" cy="0"/>
+          <a:chOff x="0" y="0"/>
+          <a:chExt cx="0" cy="0"/>
+        </a:xfrm>
+      </p:grpSpPr>
+      <p:sp>
+        <p:nvSpPr>
+          <p:cNvPr id="2" name="Slide Image Placeholder 1"/>
+          <p:cNvSpPr>
+            <a:spLocks noGrp="1"/>
+          </p:cNvSpPr>
+          <p:nvPr>
+            <p:ph type="sldImg" idx="2"/>
+          </p:nvPr>
+        </p:nvSpPr>
+        <p:spPr/>
+      </p:sp>
+      <p:sp>
+        <p:nvSpPr>
+          <p:cNvPr id="3" name="Notes Placeholder 2"/>
+          <p:cNvSpPr>
+            <a:spLocks noGrp="1"/>
+          </p:cNvSpPr>
+          <p:nvPr>
+            <p:ph type="body" idx="3" sz="quarter"/>
+          </p:nvPr>
+        </p:nvSpPr>
+        <p:spPr/>
+        <p:txBody>
+          <a:bodyPr/>
+          <a:lstStyle/>
+          <a:p>
+            <a:r>
+              <a:t>環境制約とリスク要因について見ていきます。ロードマップ策定には、これらのリスクも織り込む必要があります。</a:t>
+            </a:r>
+          </a:p>
+          <a:p>
+            <a:r>
+              <a:t>左側の気候変動の経済影響では、2050年に自然災害がGDPのマイナス2.8%、農業生産がマイナス30%、エネルギーコストがプラス40%と深刻な影響が予測されています。適応コストだけで年間8兆円が必要です。</a:t>
+            </a:r>
+          </a:p>
+          <a:p>
+            <a:r>
+              <a:t>右側のブラックスワン・リスクでは、大規模自然災害の発生確率が60%、サイバー攻撃は70%と高い確率です。</a:t>
+            </a:r>
+          </a:p>
+          <a:p>
+            <a:r>
+              <a:t>下のコンサルタントとしての活用ポイントをご覧ください。</a:t>
+            </a:r>
+          </a:p>
+          <a:p>
+            <a:r>
+              <a:t>まず、ロードマップ策定時に環境制約をシナリオに組み込むこと。水資源やエネルギーコストの上昇は全業界に影響します。</a:t>
+            </a:r>
+          </a:p>
+          <a:p>
+            <a:r>
+              <a:t>次に、サイバー攻撃リスク70%を踏まえ、セキュリティ投資はコストではなく必須投資として提案すること。</a:t>
+            </a:r>
+          </a:p>
+          <a:p>
+            <a:r>
+              <a:t>そして、ブラックスワン事象を想定したレジリエンス設計をロードマップに標準で盛り込むことです。</a:t>
+            </a:r>
+          </a:p>
+        </p:txBody>
+      </p:sp>
+      <p:sp>
+        <p:nvSpPr>
+          <p:cNvPr id="4" name="Slide Number Placeholder 3"/>
+          <p:cNvSpPr>
+            <a:spLocks noGrp="1"/>
+          </p:cNvSpPr>
+          <p:nvPr>
+            <p:ph type="sldNum" idx="5" sz="quarter"/>
+          </p:nvPr>
+        </p:nvSpPr>
+        <p:spPr/>
+      </p:sp>
+    </p:spTree>
+  </p:cSld>
+  <p:clrMapOvr>
+    <a:masterClrMapping/>
+  </p:clrMapOvr>
+</p:notes>
+</file>
+
+<file path=ppt/notesSlides/notesSlide16.xml><?xml version="1.0" encoding="utf-8"?>
+<p:notes xmlns:a="http://schemas.openxmlformats.org/drawingml/2006/main" xmlns:p="http://schemas.openxmlformats.org/presentationml/2006/main" xmlns:r="http://schemas.openxmlformats.org/officeDocument/2006/relationships">
+  <p:cSld>
+    <p:spTree>
+      <p:nvGrpSpPr>
+        <p:cNvPr id="1" name=""/>
+        <p:cNvGrpSpPr/>
+        <p:nvPr/>
+      </p:nvGrpSpPr>
+      <p:grpSpPr>
+        <a:xfrm>
+          <a:off x="0" y="0"/>
+          <a:ext cx="0" cy="0"/>
+          <a:chOff x="0" y="0"/>
+          <a:chExt cx="0" cy="0"/>
+        </a:xfrm>
+      </p:grpSpPr>
+      <p:sp>
+        <p:nvSpPr>
+          <p:cNvPr id="2" name="Slide Image Placeholder 1"/>
+          <p:cNvSpPr>
+            <a:spLocks noGrp="1"/>
+          </p:cNvSpPr>
+          <p:nvPr>
+            <p:ph type="sldImg" idx="2"/>
+          </p:nvPr>
+        </p:nvSpPr>
+        <p:spPr/>
+      </p:sp>
+      <p:sp>
+        <p:nvSpPr>
+          <p:cNvPr id="3" name="Notes Placeholder 2"/>
+          <p:cNvSpPr>
+            <a:spLocks noGrp="1"/>
+          </p:cNvSpPr>
+          <p:nvPr>
+            <p:ph type="body" idx="3" sz="quarter"/>
+          </p:nvPr>
+        </p:nvSpPr>
+        <p:spPr/>
+        <p:txBody>
+          <a:bodyPr/>
+          <a:lstStyle/>
+          <a:p>
+            <a:r>
+              <a:t>いよいよ最後のセクション、コンサル実務への活用法に入ります。</a:t>
+            </a:r>
+          </a:p>
+          <a:p>
+            <a:r>
+              <a:t>ここまで見てきた未来年表のデータを、具体的に3年後・5年後のロードマップにどう落とし込むか。</a:t>
+            </a:r>
+          </a:p>
+          <a:p>
+            <a:r>
+              <a:t>実践的なフレームワークと活用例をお伝えします。</a:t>
+            </a:r>
+          </a:p>
+        </p:txBody>
+      </p:sp>
+      <p:sp>
+        <p:nvSpPr>
+          <p:cNvPr id="4" name="Slide Number Placeholder 3"/>
+          <p:cNvSpPr>
+            <a:spLocks noGrp="1"/>
+          </p:cNvSpPr>
+          <p:nvPr>
+            <p:ph type="sldNum" idx="5" sz="quarter"/>
+          </p:nvPr>
+        </p:nvSpPr>
+        <p:spPr/>
+      </p:sp>
+    </p:spTree>
+  </p:cSld>
+  <p:clrMapOvr>
+    <a:masterClrMapping/>
+  </p:clrMapOvr>
+</p:notes>
+</file>
+
+<file path=ppt/notesSlides/notesSlide17.xml><?xml version="1.0" encoding="utf-8"?>
+<p:notes xmlns:a="http://schemas.openxmlformats.org/drawingml/2006/main" xmlns:p="http://schemas.openxmlformats.org/presentationml/2006/main" xmlns:r="http://schemas.openxmlformats.org/officeDocument/2006/relationships">
+  <p:cSld>
+    <p:spTree>
+      <p:nvGrpSpPr>
+        <p:cNvPr id="1" name=""/>
+        <p:cNvGrpSpPr/>
+        <p:nvPr/>
+      </p:nvGrpSpPr>
+      <p:grpSpPr>
+        <a:xfrm>
+          <a:off x="0" y="0"/>
+          <a:ext cx="0" cy="0"/>
+          <a:chOff x="0" y="0"/>
+          <a:chExt cx="0" cy="0"/>
+        </a:xfrm>
+      </p:grpSpPr>
+      <p:sp>
+        <p:nvSpPr>
+          <p:cNvPr id="2" name="Slide Image Placeholder 1"/>
+          <p:cNvSpPr>
+            <a:spLocks noGrp="1"/>
+          </p:cNvSpPr>
+          <p:nvPr>
+            <p:ph type="sldImg" idx="2"/>
+          </p:nvPr>
+        </p:nvSpPr>
+        <p:spPr/>
+      </p:sp>
+      <p:sp>
+        <p:nvSpPr>
+          <p:cNvPr id="3" name="Notes Placeholder 2"/>
+          <p:cNvSpPr>
+            <a:spLocks noGrp="1"/>
+          </p:cNvSpPr>
+          <p:nvPr>
+            <p:ph type="body" idx="3" sz="quarter"/>
+          </p:nvPr>
+        </p:nvSpPr>
+        <p:spPr/>
+        <p:txBody>
+          <a:bodyPr/>
+          <a:lstStyle/>
+          <a:p>
+            <a:r>
+              <a:t>未来年表を個人のキャリアシナリオに落とし込んだ例です。</a:t>
+            </a:r>
+          </a:p>
+          <a:p>
+            <a:r>
+              <a:t>左側は現在30歳、1995年生まれの方のシナリオ。30歳で中間管理職・年収500万円からスタートし、35歳でAI協働・専門性特化で650万円、45歳で創造性重視のプロジェクト型で800万円、55歳で知識継承・コンサル型で750万円という道筋です。</a:t>
+            </a:r>
+          </a:p>
+          <a:p>
+            <a:r>
+              <a:t>右側は現在20歳、α世代の方。AIネイティブとして学び、25歳でAI協創職、35歳で社会中枢のリーダー層、45歳で社会変革を主導するポスト・シンギュラリティ世代です。</a:t>
+            </a:r>
+          </a:p>
+          <a:p>
+            <a:r>
+              <a:t>下のメッセージが大切です。クライアントの従業員の年齢層に応じたキャリアシナリオを提示できると、提案の説得力が段違いに上がります。</a:t>
+            </a:r>
+          </a:p>
+          <a:p>
+            <a:r>
+              <a:t>例えば、人材育成プログラムの提案では、30代と20代で全く異なるカリキュラムが必要だということを、このデータで示せるわけです。</a:t>
+            </a:r>
+          </a:p>
+        </p:txBody>
+      </p:sp>
+      <p:sp>
+        <p:nvSpPr>
+          <p:cNvPr id="4" name="Slide Number Placeholder 3"/>
+          <p:cNvSpPr>
+            <a:spLocks noGrp="1"/>
+          </p:cNvSpPr>
+          <p:nvPr>
+            <p:ph type="sldNum" idx="5" sz="quarter"/>
+          </p:nvPr>
+        </p:nvSpPr>
+        <p:spPr/>
+      </p:sp>
+    </p:spTree>
+  </p:cSld>
+  <p:clrMapOvr>
+    <a:masterClrMapping/>
+  </p:clrMapOvr>
+</p:notes>
+</file>
+
+<file path=ppt/notesSlides/notesSlide18.xml><?xml version="1.0" encoding="utf-8"?>
+<p:notes xmlns:a="http://schemas.openxmlformats.org/drawingml/2006/main" xmlns:p="http://schemas.openxmlformats.org/presentationml/2006/main" xmlns:r="http://schemas.openxmlformats.org/officeDocument/2006/relationships">
+  <p:cSld>
+    <p:spTree>
+      <p:nvGrpSpPr>
+        <p:cNvPr id="1" name=""/>
+        <p:cNvGrpSpPr/>
+        <p:nvPr/>
+      </p:nvGrpSpPr>
+      <p:grpSpPr>
+        <a:xfrm>
+          <a:off x="0" y="0"/>
+          <a:ext cx="0" cy="0"/>
+          <a:chOff x="0" y="0"/>
+          <a:chExt cx="0" cy="0"/>
+        </a:xfrm>
+      </p:grpSpPr>
+      <p:sp>
+        <p:nvSpPr>
+          <p:cNvPr id="2" name="Slide Image Placeholder 1"/>
+          <p:cNvSpPr>
+            <a:spLocks noGrp="1"/>
+          </p:cNvSpPr>
+          <p:nvPr>
+            <p:ph type="sldImg" idx="2"/>
+          </p:nvPr>
+        </p:nvSpPr>
+        <p:spPr/>
+      </p:sp>
+      <p:sp>
+        <p:nvSpPr>
+          <p:cNvPr id="3" name="Notes Placeholder 2"/>
+          <p:cNvSpPr>
+            <a:spLocks noGrp="1"/>
+          </p:cNvSpPr>
+          <p:nvPr>
+            <p:ph type="body" idx="3" sz="quarter"/>
+          </p:nvPr>
+        </p:nvSpPr>
+        <p:spPr/>
+        <p:txBody>
+          <a:bodyPr/>
+          <a:lstStyle/>
+          <a:p>
+            <a:r>
+              <a:t>未来年表をロードマップに落とし込む3ステップのフレームワークです。</a:t>
+            </a:r>
+          </a:p>
+          <a:p>
+            <a:r>
+              <a:t>ステップ1は現状把握。クライアントの業界・地域・世代構成を確認し、未来年表のどの部分を読めばいいか特定します。</a:t>
+            </a:r>
+          </a:p>
+          <a:p>
+            <a:r>
+              <a:t>ステップ2はギャップ分析。現状と2030年・2050年の差分を明確にし、AI代替率・年収変動・人口変化から影響度を算出します。</a:t>
+            </a:r>
+          </a:p>
+          <a:p>
+            <a:r>
+              <a:t>ステップ3はロードマップ化。3年後・5年後のマイルストーンを設定し、環境リスクも織り込んだシナリオプランニングを行います。</a:t>
+            </a:r>
+          </a:p>
+          <a:p>
+            <a:r>
+              <a:t>下のメッセージの通り、「未来年表 かける Fit&amp;Gap分析 イコール 説得力のあるロードマップ」です。</a:t>
+            </a:r>
+          </a:p>
+          <a:p>
+            <a:r>
+              <a:t>このフレームワークを使えば、どのクライアントに対しても構造的に未来を見据えた提案ができるようになります。</a:t>
+            </a:r>
+          </a:p>
+        </p:txBody>
+      </p:sp>
+      <p:sp>
+        <p:nvSpPr>
+          <p:cNvPr id="4" name="Slide Number Placeholder 3"/>
+          <p:cNvSpPr>
+            <a:spLocks noGrp="1"/>
+          </p:cNvSpPr>
+          <p:nvPr>
+            <p:ph type="sldNum" idx="5" sz="quarter"/>
+          </p:nvPr>
+        </p:nvSpPr>
+        <p:spPr/>
+      </p:sp>
+    </p:spTree>
+  </p:cSld>
+  <p:clrMapOvr>
+    <a:masterClrMapping/>
+  </p:clrMapOvr>
+</p:notes>
+</file>
+
+<file path=ppt/notesSlides/notesSlide19.xml><?xml version="1.0" encoding="utf-8"?>
+<p:notes xmlns:a="http://schemas.openxmlformats.org/drawingml/2006/main" xmlns:p="http://schemas.openxmlformats.org/presentationml/2006/main" xmlns:r="http://schemas.openxmlformats.org/officeDocument/2006/relationships">
+  <p:cSld>
+    <p:spTree>
+      <p:nvGrpSpPr>
+        <p:cNvPr id="1" name=""/>
+        <p:cNvGrpSpPr/>
+        <p:nvPr/>
+      </p:nvGrpSpPr>
+      <p:grpSpPr>
+        <a:xfrm>
+          <a:off x="0" y="0"/>
+          <a:ext cx="0" cy="0"/>
+          <a:chOff x="0" y="0"/>
+          <a:chExt cx="0" cy="0"/>
+        </a:xfrm>
+      </p:grpSpPr>
+      <p:sp>
+        <p:nvSpPr>
+          <p:cNvPr id="2" name="Slide Image Placeholder 1"/>
+          <p:cNvSpPr>
+            <a:spLocks noGrp="1"/>
+          </p:cNvSpPr>
+          <p:nvPr>
+            <p:ph type="sldImg" idx="2"/>
+          </p:nvPr>
+        </p:nvSpPr>
+        <p:spPr/>
+      </p:sp>
+      <p:sp>
+        <p:nvSpPr>
+          <p:cNvPr id="3" name="Notes Placeholder 2"/>
+          <p:cNvSpPr>
+            <a:spLocks noGrp="1"/>
+          </p:cNvSpPr>
+          <p:nvPr>
+            <p:ph type="body" idx="3" sz="quarter"/>
+          </p:nvPr>
+        </p:nvSpPr>
+        <p:spPr/>
+        <p:txBody>
+          <a:bodyPr/>
+          <a:lstStyle/>
+          <a:p>
+            <a:r>
+              <a:t>未来年表の3つの活用視点をまとめました。</a:t>
+            </a:r>
+          </a:p>
+          <a:p>
+            <a:r>
+              <a:t>1つ目は企業戦略。世代別特性に応じた人材の採用・育成、AI代替率を考慮した事業転換、地域格差を踏まえた拠点配置。これらを未来年表の数字で裏付けた提案ができます。</a:t>
+            </a:r>
+          </a:p>
+          <a:p>
+            <a:r>
+              <a:t>2つ目は個人キャリア。AI代替されにくい創造性・対人力のスキル開発、地域格差を踏まえた住まい選択、インフレや技術変化を考慮した資産形成。個人向けのキャリアコンサルティングにも活用できます。</a:t>
+            </a:r>
+          </a:p>
+          <a:p>
+            <a:r>
+              <a:t>3つ目は政策提言。AI代替に伴う雇用対策・再教育、地域格差の是正、高齢化・人口減に対応する社会保障制度の設計。自治体や業界団体への提言にも使えます。</a:t>
+            </a:r>
+          </a:p>
+          <a:p>
+            <a:r>
+              <a:t>コンサルタントは、この3つの視点から未来を語れる存在であるべきです。そうすることで、単なるシステム提案ではなく、クライアントの未来を共に創るパートナーになれるのです。</a:t>
+            </a:r>
+          </a:p>
+        </p:txBody>
+      </p:sp>
+      <p:sp>
+        <p:nvSpPr>
+          <p:cNvPr id="4" name="Slide Number Placeholder 3"/>
+          <p:cNvSpPr>
+            <a:spLocks noGrp="1"/>
+          </p:cNvSpPr>
+          <p:nvPr>
+            <p:ph type="sldNum" idx="5" sz="quarter"/>
+          </p:nvPr>
+        </p:nvSpPr>
+        <p:spPr/>
+      </p:sp>
+    </p:spTree>
+  </p:cSld>
+  <p:clrMapOvr>
+    <a:masterClrMapping/>
+  </p:clrMapOvr>
+</p:notes>
+</file>
+
+<file path=ppt/notesSlides/notesSlide2.xml><?xml version="1.0" encoding="utf-8"?>
+<p:notes xmlns:a="http://schemas.openxmlformats.org/drawingml/2006/main" xmlns:p="http://schemas.openxmlformats.org/presentationml/2006/main" xmlns:r="http://schemas.openxmlformats.org/officeDocument/2006/relationships">
+  <p:cSld>
+    <p:spTree>
+      <p:nvGrpSpPr>
+        <p:cNvPr id="1" name=""/>
+        <p:cNvGrpSpPr/>
+        <p:nvPr/>
+      </p:nvGrpSpPr>
+      <p:grpSpPr>
+        <a:xfrm>
+          <a:off x="0" y="0"/>
+          <a:ext cx="0" cy="0"/>
+          <a:chOff x="0" y="0"/>
+          <a:chExt cx="0" cy="0"/>
+        </a:xfrm>
+      </p:grpSpPr>
+      <p:sp>
+        <p:nvSpPr>
+          <p:cNvPr id="2" name="Slide Image Placeholder 1"/>
+          <p:cNvSpPr>
+            <a:spLocks noGrp="1"/>
+          </p:cNvSpPr>
+          <p:nvPr>
+            <p:ph type="sldImg" idx="2"/>
+          </p:nvPr>
+        </p:nvSpPr>
+        <p:spPr/>
+      </p:sp>
+      <p:sp>
+        <p:nvSpPr>
+          <p:cNvPr id="3" name="Notes Placeholder 2"/>
+          <p:cNvSpPr>
+            <a:spLocks noGrp="1"/>
+          </p:cNvSpPr>
+          <p:nvPr>
+            <p:ph type="body" idx="3" sz="quarter"/>
+          </p:nvPr>
+        </p:nvSpPr>
+        <p:spPr/>
+        <p:txBody>
+          <a:bodyPr/>
+          <a:lstStyle/>
+          <a:p>
+            <a:r>
+              <a:t>まず、なぜコンサルタントに未来年表が必要なのかをお話しします。</a:t>
+            </a:r>
+          </a:p>
+          <a:p>
+            <a:r>
+              <a:t>3つの理由があります。</a:t>
+            </a:r>
+          </a:p>
+          <a:p>
+            <a:r>
+              <a:t>第一に、ロードマップ策定です。3年後・5年後の提案には、社会の変化を織り込む必要があります。</a:t>
+            </a:r>
+          </a:p>
+          <a:p>
+            <a:r>
+              <a:t>第二に、クライアントへの説得力です。数値に基づく未来予測があれば、提案の信頼性が格段に上がります。</a:t>
+            </a:r>
+          </a:p>
+          <a:p>
+            <a:r>
+              <a:t>第三に、リスク回避です。想定外の変化に備え、先手を打つ戦略が可能になります。</a:t>
+            </a:r>
+          </a:p>
+          <a:p>
+            <a:r>
+              <a:t>右側に本資料のカバー範囲を示しています。人口・社会構造から、業界別AI代替率、GDP推移、地域格差、世代別影響、生活の変容、環境リスク、そしてコンサル実務への活用法まで、幅広くカバーします。</a:t>
+            </a:r>
+          </a:p>
+        </p:txBody>
+      </p:sp>
+      <p:sp>
+        <p:nvSpPr>
+          <p:cNvPr id="4" name="Slide Number Placeholder 3"/>
+          <p:cNvSpPr>
+            <a:spLocks noGrp="1"/>
+          </p:cNvSpPr>
+          <p:nvPr>
+            <p:ph type="sldNum" idx="5" sz="quarter"/>
+          </p:nvPr>
+        </p:nvSpPr>
+        <p:spPr/>
+      </p:sp>
+    </p:spTree>
+  </p:cSld>
+  <p:clrMapOvr>
+    <a:masterClrMapping/>
+  </p:clrMapOvr>
+</p:notes>
+</file>
+
+<file path=ppt/notesSlides/notesSlide20.xml><?xml version="1.0" encoding="utf-8"?>
+<p:notes xmlns:a="http://schemas.openxmlformats.org/drawingml/2006/main" xmlns:p="http://schemas.openxmlformats.org/presentationml/2006/main" xmlns:r="http://schemas.openxmlformats.org/officeDocument/2006/relationships">
+  <p:cSld>
+    <p:spTree>
+      <p:nvGrpSpPr>
+        <p:cNvPr id="1" name=""/>
+        <p:cNvGrpSpPr/>
+        <p:nvPr/>
+      </p:nvGrpSpPr>
+      <p:grpSpPr>
+        <a:xfrm>
+          <a:off x="0" y="0"/>
+          <a:ext cx="0" cy="0"/>
+          <a:chOff x="0" y="0"/>
+          <a:chExt cx="0" cy="0"/>
+        </a:xfrm>
+      </p:grpSpPr>
+      <p:sp>
+        <p:nvSpPr>
+          <p:cNvPr id="2" name="Slide Image Placeholder 1"/>
+          <p:cNvSpPr>
+            <a:spLocks noGrp="1"/>
+          </p:cNvSpPr>
+          <p:nvPr>
+            <p:ph type="sldImg" idx="2"/>
+          </p:nvPr>
+        </p:nvSpPr>
+        <p:spPr/>
+      </p:sp>
+      <p:sp>
+        <p:nvSpPr>
+          <p:cNvPr id="3" name="Notes Placeholder 2"/>
+          <p:cNvSpPr>
+            <a:spLocks noGrp="1"/>
+          </p:cNvSpPr>
+          <p:nvPr>
+            <p:ph type="body" idx="3" sz="quarter"/>
+          </p:nvPr>
+        </p:nvSpPr>
+        <p:spPr/>
+        <p:txBody>
+          <a:bodyPr/>
+          <a:lstStyle/>
+          <a:p>
+            <a:r>
+              <a:t>本日のまとめです。4つのキーメッセージを確認しましょう。</a:t>
+            </a:r>
+          </a:p>
+          <a:p>
+            <a:r>
+              <a:t>1つ目、人口減少は不可避。2050年に0.95億人、23%減。しかし技術力では世界3位に上昇します。悲観ではなく、戦略的に対応すべきテーマです。</a:t>
+            </a:r>
+          </a:p>
+          <a:p>
+            <a:r>
+              <a:t>2つ目、格差拡大が最大のテーマ。平均年収は上がるが中央値は横ばい。地域格差は2.7倍に。クライアントの「どの層」「どの地域」かを見極めることが重要です。</a:t>
+            </a:r>
+          </a:p>
+          <a:p>
+            <a:r>
+              <a:t>3つ目、AI代替は脅威ではなく機会。標準化・DX推進で生産性は飛躍的に向上します。これはコンサルタントにとって最大の提案チャンスです。</a:t>
+            </a:r>
+          </a:p>
+          <a:p>
+            <a:r>
+              <a:t>4つ目、未来年表はコンサルの武器。数値に基づく提案で説得力が格段に向上し、ロードマップの根拠になります。</a:t>
+            </a:r>
+          </a:p>
+          <a:p>
+            <a:r>
+              <a:t>「未来を知ることは、未来を創ること」。これがコンサルタントの真価です。</a:t>
+            </a:r>
+          </a:p>
+        </p:txBody>
+      </p:sp>
+      <p:sp>
+        <p:nvSpPr>
+          <p:cNvPr id="4" name="Slide Number Placeholder 3"/>
+          <p:cNvSpPr>
+            <a:spLocks noGrp="1"/>
+          </p:cNvSpPr>
+          <p:nvPr>
+            <p:ph type="sldNum" idx="5" sz="quarter"/>
+          </p:nvPr>
+        </p:nvSpPr>
+        <p:spPr/>
+      </p:sp>
+    </p:spTree>
+  </p:cSld>
+  <p:clrMapOvr>
+    <a:masterClrMapping/>
+  </p:clrMapOvr>
+</p:notes>
+</file>
+
+<file path=ppt/notesSlides/notesSlide21.xml><?xml version="1.0" encoding="utf-8"?>
+<p:notes xmlns:a="http://schemas.openxmlformats.org/drawingml/2006/main" xmlns:p="http://schemas.openxmlformats.org/presentationml/2006/main" xmlns:r="http://schemas.openxmlformats.org/officeDocument/2006/relationships">
+  <p:cSld>
+    <p:spTree>
+      <p:nvGrpSpPr>
+        <p:cNvPr id="1" name=""/>
+        <p:cNvGrpSpPr/>
+        <p:nvPr/>
+      </p:nvGrpSpPr>
+      <p:grpSpPr>
+        <a:xfrm>
+          <a:off x="0" y="0"/>
+          <a:ext cx="0" cy="0"/>
+          <a:chOff x="0" y="0"/>
+          <a:chExt cx="0" cy="0"/>
+        </a:xfrm>
+      </p:grpSpPr>
+      <p:sp>
+        <p:nvSpPr>
+          <p:cNvPr id="2" name="Slide Image Placeholder 1"/>
+          <p:cNvSpPr>
+            <a:spLocks noGrp="1"/>
+          </p:cNvSpPr>
+          <p:nvPr>
+            <p:ph type="sldImg" idx="2"/>
+          </p:nvPr>
+        </p:nvSpPr>
+        <p:spPr/>
+      </p:sp>
+      <p:sp>
+        <p:nvSpPr>
+          <p:cNvPr id="3" name="Notes Placeholder 2"/>
+          <p:cNvSpPr>
+            <a:spLocks noGrp="1"/>
+          </p:cNvSpPr>
+          <p:nvPr>
+            <p:ph type="body" idx="3" sz="quarter"/>
+          </p:nvPr>
+        </p:nvSpPr>
+        <p:spPr/>
+        <p:txBody>
+          <a:bodyPr/>
+          <a:lstStyle/>
+          <a:p>
+            <a:r>
+              <a:t>以上で本日の勉強会は終了です。ご清聴ありがとうございました。</a:t>
+            </a:r>
+          </a:p>
+          <a:p>
+            <a:r>
+              <a:t>本日お伝えした未来年表のデータは、明日からの提案活動にすぐに活用いただけます。</a:t>
+            </a:r>
+          </a:p>
+          <a:p>
+            <a:r>
+              <a:t>クライアントとの会話の中で「2050年には〇〇になる」と数字を添えて語るだけで、提案の深みが全く変わります。</a:t>
+            </a:r>
+          </a:p>
+          <a:p>
+            <a:r>
+              <a:t>ぜひ今日の資料を手元に置いて、ロードマップ策定やクライアントへのプレゼンに活かしてください。</a:t>
+            </a:r>
+          </a:p>
+          <a:p>
+            <a:r>
+              <a:t>ご質問やディスカッションがあれば、ぜひお気軽にどうぞ。</a:t>
+            </a:r>
+          </a:p>
+          <a:p>
+            <a:r>
+              <a:t>Harmonic Insightは、未来を知り、共に歩むパートナーとして、皆さんのコンサルティング活動を支援してまいります。</a:t>
+            </a:r>
+          </a:p>
+        </p:txBody>
+      </p:sp>
+      <p:sp>
+        <p:nvSpPr>
+          <p:cNvPr id="4" name="Slide Number Placeholder 3"/>
+          <p:cNvSpPr>
+            <a:spLocks noGrp="1"/>
+          </p:cNvSpPr>
+          <p:nvPr>
+            <p:ph type="sldNum" idx="5" sz="quarter"/>
+          </p:nvPr>
+        </p:nvSpPr>
+        <p:spPr/>
+      </p:sp>
+    </p:spTree>
+  </p:cSld>
+  <p:clrMapOvr>
+    <a:masterClrMapping/>
+  </p:clrMapOvr>
+</p:notes>
+</file>
+
+<file path=ppt/notesSlides/notesSlide3.xml><?xml version="1.0" encoding="utf-8"?>
+<p:notes xmlns:a="http://schemas.openxmlformats.org/drawingml/2006/main" xmlns:p="http://schemas.openxmlformats.org/presentationml/2006/main" xmlns:r="http://schemas.openxmlformats.org/officeDocument/2006/relationships">
+  <p:cSld>
+    <p:spTree>
+      <p:nvGrpSpPr>
+        <p:cNvPr id="1" name=""/>
+        <p:cNvGrpSpPr/>
+        <p:nvPr/>
+      </p:nvGrpSpPr>
+      <p:grpSpPr>
+        <a:xfrm>
+          <a:off x="0" y="0"/>
+          <a:ext cx="0" cy="0"/>
+          <a:chOff x="0" y="0"/>
+          <a:chExt cx="0" cy="0"/>
+        </a:xfrm>
+      </p:grpSpPr>
+      <p:sp>
+        <p:nvSpPr>
+          <p:cNvPr id="2" name="Slide Image Placeholder 1"/>
+          <p:cNvSpPr>
+            <a:spLocks noGrp="1"/>
+          </p:cNvSpPr>
+          <p:nvPr>
+            <p:ph type="sldImg" idx="2"/>
+          </p:nvPr>
+        </p:nvSpPr>
+        <p:spPr/>
+      </p:sp>
+      <p:sp>
+        <p:nvSpPr>
+          <p:cNvPr id="3" name="Notes Placeholder 2"/>
+          <p:cNvSpPr>
+            <a:spLocks noGrp="1"/>
+          </p:cNvSpPr>
+          <p:nvPr>
+            <p:ph type="body" idx="3" sz="quarter"/>
+          </p:nvPr>
+        </p:nvSpPr>
+        <p:spPr/>
+        <p:txBody>
+          <a:bodyPr/>
+          <a:lstStyle/>
+          <a:p>
+            <a:r>
+              <a:t>こちらは日本の未来ダッシュボードです。2025年から2050年の25年間で、日本がどう変わるかを6つの主要指標で俯瞰します。</a:t>
+            </a:r>
+          </a:p>
+          <a:p>
+            <a:r>
+              <a:t>まず人口。1.23億人から0.95億人へ、23%も減少します。これは4人に1人がいなくなる計算です。</a:t>
+            </a:r>
+          </a:p>
+          <a:p>
+            <a:r>
+              <a:t>高齢化率は28.6%から39%へ。国民の約4割が65歳以上になります。</a:t>
+            </a:r>
+          </a:p>
+          <a:p>
+            <a:r>
+              <a:t>GDP世界順位は3位から8位へ下がります。ただし、これは他国の成長によるもので、日本が衰退するわけではありません。</a:t>
+            </a:r>
+          </a:p>
+          <a:p>
+            <a:r>
+              <a:t>外国人比率は3.5%から12.8%へ。人手不足を外国人労働者で補う形が進みます。</a:t>
+            </a:r>
+          </a:p>
+          <a:p>
+            <a:r>
+              <a:t>そして明るい材料もあります。AI技術力は6位から3位へ上昇、労働生産性も28位から15位へ大幅に改善します。</a:t>
+            </a:r>
+          </a:p>
+          <a:p>
+            <a:r>
+              <a:t>このダッシュボードは、クライアントへの提案の冒頭に使うと非常にインパクトがあります。</a:t>
+            </a:r>
+          </a:p>
+        </p:txBody>
+      </p:sp>
+      <p:sp>
+        <p:nvSpPr>
+          <p:cNvPr id="4" name="Slide Number Placeholder 3"/>
+          <p:cNvSpPr>
+            <a:spLocks noGrp="1"/>
+          </p:cNvSpPr>
+          <p:nvPr>
+            <p:ph type="sldNum" idx="5" sz="quarter"/>
+          </p:nvPr>
+        </p:nvSpPr>
+        <p:spPr/>
+      </p:sp>
+    </p:spTree>
+  </p:cSld>
+  <p:clrMapOvr>
+    <a:masterClrMapping/>
+  </p:clrMapOvr>
+</p:notes>
+</file>
+
+<file path=ppt/notesSlides/notesSlide4.xml><?xml version="1.0" encoding="utf-8"?>
+<p:notes xmlns:a="http://schemas.openxmlformats.org/drawingml/2006/main" xmlns:p="http://schemas.openxmlformats.org/presentationml/2006/main" xmlns:r="http://schemas.openxmlformats.org/officeDocument/2006/relationships">
+  <p:cSld>
+    <p:spTree>
+      <p:nvGrpSpPr>
+        <p:cNvPr id="1" name=""/>
+        <p:cNvGrpSpPr/>
+        <p:nvPr/>
+      </p:nvGrpSpPr>
+      <p:grpSpPr>
+        <a:xfrm>
+          <a:off x="0" y="0"/>
+          <a:ext cx="0" cy="0"/>
+          <a:chOff x="0" y="0"/>
+          <a:chExt cx="0" cy="0"/>
+        </a:xfrm>
+      </p:grpSpPr>
+      <p:sp>
+        <p:nvSpPr>
+          <p:cNvPr id="2" name="Slide Image Placeholder 1"/>
+          <p:cNvSpPr>
+            <a:spLocks noGrp="1"/>
+          </p:cNvSpPr>
+          <p:nvPr>
+            <p:ph type="sldImg" idx="2"/>
+          </p:nvPr>
+        </p:nvSpPr>
+        <p:spPr/>
+      </p:sp>
+      <p:sp>
+        <p:nvSpPr>
+          <p:cNvPr id="3" name="Notes Placeholder 2"/>
+          <p:cNvSpPr>
+            <a:spLocks noGrp="1"/>
+          </p:cNvSpPr>
+          <p:nvPr>
+            <p:ph type="body" idx="3" sz="quarter"/>
+          </p:nvPr>
+        </p:nvSpPr>
+        <p:spPr/>
+        <p:txBody>
+          <a:bodyPr/>
+          <a:lstStyle/>
+          <a:p>
+            <a:r>
+              <a:t>この社会変化マトリクスは、人口・経済・技術・働き方・平均年収の5軸で、2025年から2050年までを5年刻みで俯瞰しています。</a:t>
+            </a:r>
+          </a:p>
+          <a:p>
+            <a:r>
+              <a:t>人口は一貫して減少し、2050年には1億人を割ります。</a:t>
+            </a:r>
+          </a:p>
+          <a:p>
+            <a:r>
+              <a:t>経済面ではGDPの絶対額が540兆円から430兆円に減少。世界順位も3位から8位に後退します。</a:t>
+            </a:r>
+          </a:p>
+          <a:p>
+            <a:r>
+              <a:t>技術面では劇的な変化があります。2025年のスマホとAI業務支援から始まり、2030年にはARグラスが普及しAGIが実現。2040年には体内センサーや創造協働AIが登場し、2050年には脳とPCが直接接続される時代が来ると予測されています。</a:t>
+            </a:r>
+          </a:p>
+          <a:p>
+            <a:r>
+              <a:t>働き方も大きく変わります。終身雇用は2025年の30%からさらに減少し、プロジェクト型・実力主義の社会に移行します。</a:t>
+            </a:r>
+          </a:p>
+          <a:p>
+            <a:r>
+              <a:t>注目すべきは平均年収です。名目では420万円から580万円に上がりますが、実質ベースでは400万円から450万円。つまり、ほとんど変わらない。これが「格差拡大」という最大テーマにつながります。</a:t>
+            </a:r>
+          </a:p>
+        </p:txBody>
+      </p:sp>
+      <p:sp>
+        <p:nvSpPr>
+          <p:cNvPr id="4" name="Slide Number Placeholder 3"/>
+          <p:cNvSpPr>
+            <a:spLocks noGrp="1"/>
+          </p:cNvSpPr>
+          <p:nvPr>
+            <p:ph type="sldNum" idx="5" sz="quarter"/>
+          </p:nvPr>
+        </p:nvSpPr>
+        <p:spPr/>
+      </p:sp>
+    </p:spTree>
+  </p:cSld>
+  <p:clrMapOvr>
+    <a:masterClrMapping/>
+  </p:clrMapOvr>
+</p:notes>
+</file>
+
+<file path=ppt/notesSlides/notesSlide5.xml><?xml version="1.0" encoding="utf-8"?>
+<p:notes xmlns:a="http://schemas.openxmlformats.org/drawingml/2006/main" xmlns:p="http://schemas.openxmlformats.org/presentationml/2006/main" xmlns:r="http://schemas.openxmlformats.org/officeDocument/2006/relationships">
+  <p:cSld>
+    <p:spTree>
+      <p:nvGrpSpPr>
+        <p:cNvPr id="1" name=""/>
+        <p:cNvGrpSpPr/>
+        <p:nvPr/>
+      </p:nvGrpSpPr>
+      <p:grpSpPr>
+        <a:xfrm>
+          <a:off x="0" y="0"/>
+          <a:ext cx="0" cy="0"/>
+          <a:chOff x="0" y="0"/>
+          <a:chExt cx="0" cy="0"/>
+        </a:xfrm>
+      </p:grpSpPr>
+      <p:sp>
+        <p:nvSpPr>
+          <p:cNvPr id="2" name="Slide Image Placeholder 1"/>
+          <p:cNvSpPr>
+            <a:spLocks noGrp="1"/>
+          </p:cNvSpPr>
+          <p:nvPr>
+            <p:ph type="sldImg" idx="2"/>
+          </p:nvPr>
+        </p:nvSpPr>
+        <p:spPr/>
+      </p:sp>
+      <p:sp>
+        <p:nvSpPr>
+          <p:cNvPr id="3" name="Notes Placeholder 2"/>
+          <p:cNvSpPr>
+            <a:spLocks noGrp="1"/>
+          </p:cNvSpPr>
+          <p:nvPr>
+            <p:ph type="body" idx="3" sz="quarter"/>
+          </p:nvPr>
+        </p:nvSpPr>
+        <p:spPr/>
+        <p:txBody>
+          <a:bodyPr/>
+          <a:lstStyle/>
+          <a:p>
+            <a:r>
+              <a:t>ここからセクション1、業界別のAI代替率と年収変動に入ります。</a:t>
+            </a:r>
+          </a:p>
+          <a:p>
+            <a:r>
+              <a:t>皆さんのクライアントの業界が、AIによってどのくらい変わるのか。</a:t>
+            </a:r>
+          </a:p>
+          <a:p>
+            <a:r>
+              <a:t>これを正確に把握することが、的確な提案につながります。</a:t>
+            </a:r>
+          </a:p>
+          <a:p>
+            <a:r>
+              <a:t>それでは具体的な数字を見ていきましょう。</a:t>
+            </a:r>
+          </a:p>
+        </p:txBody>
+      </p:sp>
+      <p:sp>
+        <p:nvSpPr>
+          <p:cNvPr id="4" name="Slide Number Placeholder 3"/>
+          <p:cNvSpPr>
+            <a:spLocks noGrp="1"/>
+          </p:cNvSpPr>
+          <p:nvPr>
+            <p:ph type="sldNum" idx="5" sz="quarter"/>
+          </p:nvPr>
+        </p:nvSpPr>
+        <p:spPr/>
+      </p:sp>
+    </p:spTree>
+  </p:cSld>
+  <p:clrMapOvr>
+    <a:masterClrMapping/>
+  </p:clrMapOvr>
+</p:notes>
+</file>
+
+<file path=ppt/notesSlides/notesSlide6.xml><?xml version="1.0" encoding="utf-8"?>
+<p:notes xmlns:a="http://schemas.openxmlformats.org/drawingml/2006/main" xmlns:p="http://schemas.openxmlformats.org/presentationml/2006/main" xmlns:r="http://schemas.openxmlformats.org/officeDocument/2006/relationships">
+  <p:cSld>
+    <p:spTree>
+      <p:nvGrpSpPr>
+        <p:cNvPr id="1" name=""/>
+        <p:cNvGrpSpPr/>
+        <p:nvPr/>
+      </p:nvGrpSpPr>
+      <p:grpSpPr>
+        <a:xfrm>
+          <a:off x="0" y="0"/>
+          <a:ext cx="0" cy="0"/>
+          <a:chOff x="0" y="0"/>
+          <a:chExt cx="0" cy="0"/>
+        </a:xfrm>
+      </p:grpSpPr>
+      <p:sp>
+        <p:nvSpPr>
+          <p:cNvPr id="2" name="Slide Image Placeholder 1"/>
+          <p:cNvSpPr>
+            <a:spLocks noGrp="1"/>
+          </p:cNvSpPr>
+          <p:nvPr>
+            <p:ph type="sldImg" idx="2"/>
+          </p:nvPr>
+        </p:nvSpPr>
+        <p:spPr/>
+      </p:sp>
+      <p:sp>
+        <p:nvSpPr>
+          <p:cNvPr id="3" name="Notes Placeholder 2"/>
+          <p:cNvSpPr>
+            <a:spLocks noGrp="1"/>
+          </p:cNvSpPr>
+          <p:nvPr>
+            <p:ph type="body" idx="3" sz="quarter"/>
+          </p:nvPr>
+        </p:nvSpPr>
+        <p:spPr/>
+        <p:txBody>
+          <a:bodyPr/>
+          <a:lstStyle/>
+          <a:p>
+            <a:r>
+              <a:t>業界別のAI代替率の推移を一覧で示しています。</a:t>
+            </a:r>
+          </a:p>
+          <a:p>
+            <a:r>
+              <a:t>製造業は2025年の30%から2050年には90%まで代替が進みます。金融・保険は85%、小売・流通は80%と、多くの業界で過半数以上の業務がAIに置き換わります。</a:t>
+            </a:r>
+          </a:p>
+          <a:p>
+            <a:r>
+              <a:t>一方、医療・介護は40%、教育は60%と、人間性や創造性が求められる分野は代替率が低めです。</a:t>
+            </a:r>
+          </a:p>
+          <a:p>
+            <a:r>
+              <a:t>ここで最も重要なのは右端の「中央値年収変動」の列です。</a:t>
+            </a:r>
+          </a:p>
+          <a:p>
+            <a:r>
+              <a:t>金融・保険はマイナス21%と極端な二極化。小売・流通はマイナス13%で低賃金化。</a:t>
+            </a:r>
+          </a:p>
+          <a:p>
+            <a:r>
+              <a:t>逆に建設・不動産はプラス14%、医療・介護はプラス19%、農業はプラス36%と、人手不足の業界は年収が上がります。</a:t>
+            </a:r>
+          </a:p>
+          <a:p>
+            <a:r>
+              <a:t>下のメモにある通り、「平均年収プラス100%の罠」に注意してください。平均は上がっても中央値は下がる業界が多いのです。</a:t>
+            </a:r>
+          </a:p>
+        </p:txBody>
+      </p:sp>
+      <p:sp>
+        <p:nvSpPr>
+          <p:cNvPr id="4" name="Slide Number Placeholder 3"/>
+          <p:cNvSpPr>
+            <a:spLocks noGrp="1"/>
+          </p:cNvSpPr>
+          <p:nvPr>
+            <p:ph type="sldNum" idx="5" sz="quarter"/>
+          </p:nvPr>
+        </p:nvSpPr>
+        <p:spPr/>
+      </p:sp>
+    </p:spTree>
+  </p:cSld>
+  <p:clrMapOvr>
+    <a:masterClrMapping/>
+  </p:clrMapOvr>
+</p:notes>
+</file>
+
+<file path=ppt/notesSlides/notesSlide7.xml><?xml version="1.0" encoding="utf-8"?>
+<p:notes xmlns:a="http://schemas.openxmlformats.org/drawingml/2006/main" xmlns:p="http://schemas.openxmlformats.org/presentationml/2006/main" xmlns:r="http://schemas.openxmlformats.org/officeDocument/2006/relationships">
+  <p:cSld>
+    <p:spTree>
+      <p:nvGrpSpPr>
+        <p:cNvPr id="1" name=""/>
+        <p:cNvGrpSpPr/>
+        <p:nvPr/>
+      </p:nvGrpSpPr>
+      <p:grpSpPr>
+        <a:xfrm>
+          <a:off x="0" y="0"/>
+          <a:ext cx="0" cy="0"/>
+          <a:chOff x="0" y="0"/>
+          <a:chExt cx="0" cy="0"/>
+        </a:xfrm>
+      </p:grpSpPr>
+      <p:sp>
+        <p:nvSpPr>
+          <p:cNvPr id="2" name="Slide Image Placeholder 1"/>
+          <p:cNvSpPr>
+            <a:spLocks noGrp="1"/>
+          </p:cNvSpPr>
+          <p:nvPr>
+            <p:ph type="sldImg" idx="2"/>
+          </p:nvPr>
+        </p:nvSpPr>
+        <p:spPr/>
+      </p:sp>
+      <p:sp>
+        <p:nvSpPr>
+          <p:cNvPr id="3" name="Notes Placeholder 2"/>
+          <p:cNvSpPr>
+            <a:spLocks noGrp="1"/>
+          </p:cNvSpPr>
+          <p:nvPr>
+            <p:ph type="body" idx="3" sz="quarter"/>
+          </p:nvPr>
+        </p:nvSpPr>
+        <p:spPr/>
+        <p:txBody>
+          <a:bodyPr/>
+          <a:lstStyle/>
+          <a:p>
+            <a:r>
+              <a:t>先ほどの「平均年収プラス100%の罠」を具体的に見てみましょう。</a:t>
+            </a:r>
+          </a:p>
+          <a:p>
+            <a:r>
+              <a:t>左側は製造業の2050年予測です。平均年収は900万円と一見高く見えます。しかし、その内訳を見ると、上位10%のAI設計者が2,000万から3,000万円を稼ぐ一方、中央値の一般作業者は380万円。下位30%の非正規はわずか250万円です。</a:t>
+            </a:r>
+          </a:p>
+          <a:p>
+            <a:r>
+              <a:t>右側の金融業はさらに極端です。平均1,100万円ですが、上位5%のAIアナリストが3,000万円以上。中央値の一般事務は380万円。下位30%のAI代替職は200万円にまで落ちます。</a:t>
+            </a:r>
+          </a:p>
+          <a:p>
+            <a:r>
+              <a:t>同じ業界内で最大12倍の格差が生まれるということです。</a:t>
+            </a:r>
+          </a:p>
+          <a:p>
+            <a:r>
+              <a:t>コンサルタントとして重要なのは、クライアントの従業員が「どの層」にいるかを見極めることです。それによって提案内容が全く変わってきます。</a:t>
+            </a:r>
+          </a:p>
+        </p:txBody>
+      </p:sp>
+      <p:sp>
+        <p:nvSpPr>
+          <p:cNvPr id="4" name="Slide Number Placeholder 3"/>
+          <p:cNvSpPr>
+            <a:spLocks noGrp="1"/>
+          </p:cNvSpPr>
+          <p:nvPr>
+            <p:ph type="sldNum" idx="5" sz="quarter"/>
+          </p:nvPr>
+        </p:nvSpPr>
+        <p:spPr/>
+      </p:sp>
+    </p:spTree>
+  </p:cSld>
+  <p:clrMapOvr>
+    <a:masterClrMapping/>
+  </p:clrMapOvr>
+</p:notes>
+</file>
+
+<file path=ppt/notesSlides/notesSlide8.xml><?xml version="1.0" encoding="utf-8"?>
+<p:notes xmlns:a="http://schemas.openxmlformats.org/drawingml/2006/main" xmlns:p="http://schemas.openxmlformats.org/presentationml/2006/main" xmlns:r="http://schemas.openxmlformats.org/officeDocument/2006/relationships">
+  <p:cSld>
+    <p:spTree>
+      <p:nvGrpSpPr>
+        <p:cNvPr id="1" name=""/>
+        <p:cNvGrpSpPr/>
+        <p:nvPr/>
+      </p:nvGrpSpPr>
+      <p:grpSpPr>
+        <a:xfrm>
+          <a:off x="0" y="0"/>
+          <a:ext cx="0" cy="0"/>
+          <a:chOff x="0" y="0"/>
+          <a:chExt cx="0" cy="0"/>
+        </a:xfrm>
+      </p:grpSpPr>
+      <p:sp>
+        <p:nvSpPr>
+          <p:cNvPr id="2" name="Slide Image Placeholder 1"/>
+          <p:cNvSpPr>
+            <a:spLocks noGrp="1"/>
+          </p:cNvSpPr>
+          <p:nvPr>
+            <p:ph type="sldImg" idx="2"/>
+          </p:nvPr>
+        </p:nvSpPr>
+        <p:spPr/>
+      </p:sp>
+      <p:sp>
+        <p:nvSpPr>
+          <p:cNvPr id="3" name="Notes Placeholder 2"/>
+          <p:cNvSpPr>
+            <a:spLocks noGrp="1"/>
+          </p:cNvSpPr>
+          <p:nvPr>
+            <p:ph type="body" idx="3" sz="quarter"/>
+          </p:nvPr>
+        </p:nvSpPr>
+        <p:spPr/>
+        <p:txBody>
+          <a:bodyPr/>
+          <a:lstStyle/>
+          <a:p>
+            <a:r>
+              <a:t>建設業のAI代替を詳しく見ていきます。コンサルタントの皆さんにとって建設業は主要なクライアントセクターですので、しっかり押さえましょう。</a:t>
+            </a:r>
+          </a:p>
+          <a:p>
+            <a:r>
+              <a:t>設計業務では、CAD作成が80%、構造計算が90%、法規チェックが95%とほぼ完全にAI化されます。</a:t>
+            </a:r>
+          </a:p>
+          <a:p>
+            <a:r>
+              <a:t>施工業務は、測量が70%、重機操作が60%、品質検査が80%です。</a:t>
+            </a:r>
+          </a:p>
+          <a:p>
+            <a:r>
+              <a:t>管理業務も工程管理90%、資材発注85%と高い代替率です。</a:t>
+            </a:r>
+          </a:p>
+          <a:p>
+            <a:r>
+              <a:t>一方、残存業務として「創造的設計」「現場判断」「職人技」は人間が不可欠な領域として残ります。</a:t>
+            </a:r>
+          </a:p>
+          <a:p>
+            <a:r>
+              <a:t>年収予測は平均720万円、中央値480万円でプラス14%。人手不足により待遇は改善傾向にあります。</a:t>
+            </a:r>
+          </a:p>
+          <a:p>
+            <a:r>
+              <a:t>特にスマート建築設計者は年収1,200万円と高額です。建設DXの提案では、この「残存業務」と「高付加価値人材」に焦点を当てると効果的です。</a:t>
+            </a:r>
+          </a:p>
+        </p:txBody>
+      </p:sp>
+      <p:sp>
+        <p:nvSpPr>
+          <p:cNvPr id="4" name="Slide Number Placeholder 3"/>
+          <p:cNvSpPr>
+            <a:spLocks noGrp="1"/>
+          </p:cNvSpPr>
+          <p:nvPr>
+            <p:ph type="sldNum" idx="5" sz="quarter"/>
+          </p:nvPr>
+        </p:nvSpPr>
+        <p:spPr/>
+      </p:sp>
+    </p:spTree>
+  </p:cSld>
+  <p:clrMapOvr>
+    <a:masterClrMapping/>
+  </p:clrMapOvr>
+</p:notes>
+</file>
+
+<file path=ppt/notesSlides/notesSlide9.xml><?xml version="1.0" encoding="utf-8"?>
+<p:notes xmlns:a="http://schemas.openxmlformats.org/drawingml/2006/main" xmlns:p="http://schemas.openxmlformats.org/presentationml/2006/main" xmlns:r="http://schemas.openxmlformats.org/officeDocument/2006/relationships">
+  <p:cSld>
+    <p:spTree>
+      <p:nvGrpSpPr>
+        <p:cNvPr id="1" name=""/>
+        <p:cNvGrpSpPr/>
+        <p:nvPr/>
+      </p:nvGrpSpPr>
+      <p:grpSpPr>
+        <a:xfrm>
+          <a:off x="0" y="0"/>
+          <a:ext cx="0" cy="0"/>
+          <a:chOff x="0" y="0"/>
+          <a:chExt cx="0" cy="0"/>
+        </a:xfrm>
+      </p:grpSpPr>
+      <p:sp>
+        <p:nvSpPr>
+          <p:cNvPr id="2" name="Slide Image Placeholder 1"/>
+          <p:cNvSpPr>
+            <a:spLocks noGrp="1"/>
+          </p:cNvSpPr>
+          <p:nvPr>
+            <p:ph type="sldImg" idx="2"/>
+          </p:nvPr>
+        </p:nvSpPr>
+        <p:spPr/>
+      </p:sp>
+      <p:sp>
+        <p:nvSpPr>
+          <p:cNvPr id="3" name="Notes Placeholder 2"/>
+          <p:cNvSpPr>
+            <a:spLocks noGrp="1"/>
+          </p:cNvSpPr>
+          <p:nvPr>
+            <p:ph type="body" idx="3" sz="quarter"/>
+          </p:nvPr>
+        </p:nvSpPr>
+        <p:spPr/>
+        <p:txBody>
+          <a:bodyPr/>
+          <a:lstStyle/>
+          <a:p>
+            <a:r>
+              <a:t>セクション2では、地域格差と世代別の未来を見ていきます。</a:t>
+            </a:r>
+          </a:p>
+          <a:p>
+            <a:r>
+              <a:t>コンサルタントの提案先が「どこ」にあって「誰」が意思決定者なのかによって、未来の見え方は全く異なります。</a:t>
+            </a:r>
+          </a:p>
+          <a:p>
+            <a:r>
+              <a:t>同じDX提案でも、東京の大企業と地方の中小企業では、まったく違うアプローチが必要です。</a:t>
+            </a:r>
+          </a:p>
+        </p:txBody>
+      </p:sp>
+      <p:sp>
+        <p:nvSpPr>
+          <p:cNvPr id="4" name="Slide Number Placeholder 3"/>
+          <p:cNvSpPr>
+            <a:spLocks noGrp="1"/>
+          </p:cNvSpPr>
+          <p:nvPr>
+            <p:ph type="sldNum" idx="5" sz="quarter"/>
+          </p:nvPr>
+        </p:nvSpPr>
+        <p:spPr/>
+      </p:sp>
+    </p:spTree>
+  </p:cSld>
+  <p:clrMapOvr>
+    <a:masterClrMapping/>
+  </p:clrMapOvr>
+</p:notes>
 </file>
 
 <file path=ppt/slideLayouts/slideLayout1.xml><?xml version="1.0" encoding="utf-8"?>
@@ -29173,4 +31473,324 @@
   </a:objectDefaults>
   <a:extraClrSchemeLst/>
 </a:theme>
+</file>
+
+<file path=ppt/theme/theme2.xml><?xml version="1.0" encoding="utf-8"?>
+<a:theme xmlns:a="http://schemas.openxmlformats.org/drawingml/2006/main" name="Office Theme">
+  <a:themeElements>
+    <a:clrScheme name="Office">
+      <a:dk1>
+        <a:sysClr val="windowText" lastClr="000000"/>
+      </a:dk1>
+      <a:lt1>
+        <a:sysClr val="window" lastClr="FFFFFF"/>
+      </a:lt1>
+      <a:dk2>
+        <a:srgbClr val="1F497D"/>
+      </a:dk2>
+      <a:lt2>
+        <a:srgbClr val="EEECE1"/>
+      </a:lt2>
+      <a:accent1>
+        <a:srgbClr val="4F81BD"/>
+      </a:accent1>
+      <a:accent2>
+        <a:srgbClr val="C0504D"/>
+      </a:accent2>
+      <a:accent3>
+        <a:srgbClr val="9BBB59"/>
+      </a:accent3>
+      <a:accent4>
+        <a:srgbClr val="8064A2"/>
+      </a:accent4>
+      <a:accent5>
+        <a:srgbClr val="4BACC6"/>
+      </a:accent5>
+      <a:accent6>
+        <a:srgbClr val="F79646"/>
+      </a:accent6>
+      <a:hlink>
+        <a:srgbClr val="0000FF"/>
+      </a:hlink>
+      <a:folHlink>
+        <a:srgbClr val="800080"/>
+      </a:folHlink>
+    </a:clrScheme>
+    <a:fontScheme name="Office">
+      <a:majorFont>
+        <a:latin typeface="Calibri"/>
+        <a:ea typeface=""/>
+        <a:cs typeface=""/>
+        <a:font script="Jpan" typeface="ＭＳ Ｐゴシック"/>
+        <a:font script="Hang" typeface="맑은 고딕"/>
+        <a:font script="Hans" typeface="宋体"/>
+        <a:font script="Hant" typeface="新細明體"/>
+        <a:font script="Arab" typeface="Times New Roman"/>
+        <a:font script="Hebr" typeface="Times New Roman"/>
+        <a:font script="Thai" typeface="Angsana New"/>
+        <a:font script="Ethi" typeface="Nyala"/>
+        <a:font script="Beng" typeface="Vrinda"/>
+        <a:font script="Gujr" typeface="Shruti"/>
+        <a:font script="Khmr" typeface="MoolBoran"/>
+        <a:font script="Knda" typeface="Tunga"/>
+        <a:font script="Guru" typeface="Raavi"/>
+        <a:font script="Cans" typeface="Euphemia"/>
+        <a:font script="Cher" typeface="Plantagenet Cherokee"/>
+        <a:font script="Yiii" typeface="Microsoft Yi Baiti"/>
+        <a:font script="Tibt" typeface="Microsoft Himalaya"/>
+        <a:font script="Thaa" typeface="MV Boli"/>
+        <a:font script="Deva" typeface="Mangal"/>
+        <a:font script="Telu" typeface="Gautami"/>
+        <a:font script="Taml" typeface="Latha"/>
+        <a:font script="Syrc" typeface="Estrangelo Edessa"/>
+        <a:font script="Orya" typeface="Kalinga"/>
+        <a:font script="Mlym" typeface="Kartika"/>
+        <a:font script="Laoo" typeface="DokChampa"/>
+        <a:font script="Sinh" typeface="Iskoola Pota"/>
+        <a:font script="Mong" typeface="Mongolian Baiti"/>
+        <a:font script="Viet" typeface="Times New Roman"/>
+        <a:font script="Uigh" typeface="Microsoft Uighur"/>
+        <a:font script="Geor" typeface="Sylfaen"/>
+      </a:majorFont>
+      <a:minorFont>
+        <a:latin typeface="Calibri"/>
+        <a:ea typeface=""/>
+        <a:cs typeface=""/>
+        <a:font script="Jpan" typeface="ＭＳ Ｐゴシック"/>
+        <a:font script="Hang" typeface="맑은 고딕"/>
+        <a:font script="Hans" typeface="宋体"/>
+        <a:font script="Hant" typeface="新細明體"/>
+        <a:font script="Arab" typeface="Arial"/>
+        <a:font script="Hebr" typeface="Arial"/>
+        <a:font script="Thai" typeface="Cordia New"/>
+        <a:font script="Ethi" typeface="Nyala"/>
+        <a:font script="Beng" typeface="Vrinda"/>
+        <a:font script="Gujr" typeface="Shruti"/>
+        <a:font script="Khmr" typeface="DaunPenh"/>
+        <a:font script="Knda" typeface="Tunga"/>
+        <a:font script="Guru" typeface="Raavi"/>
+        <a:font script="Cans" typeface="Euphemia"/>
+        <a:font script="Cher" typeface="Plantagenet Cherokee"/>
+        <a:font script="Yiii" typeface="Microsoft Yi Baiti"/>
+        <a:font script="Tibt" typeface="Microsoft Himalaya"/>
+        <a:font script="Thaa" typeface="MV Boli"/>
+        <a:font script="Deva" typeface="Mangal"/>
+        <a:font script="Telu" typeface="Gautami"/>
+        <a:font script="Taml" typeface="Latha"/>
+        <a:font script="Syrc" typeface="Estrangelo Edessa"/>
+        <a:font script="Orya" typeface="Kalinga"/>
+        <a:font script="Mlym" typeface="Kartika"/>
+        <a:font script="Laoo" typeface="DokChampa"/>
+        <a:font script="Sinh" typeface="Iskoola Pota"/>
+        <a:font script="Mong" typeface="Mongolian Baiti"/>
+        <a:font script="Viet" typeface="Arial"/>
+        <a:font script="Uigh" typeface="Microsoft Uighur"/>
+        <a:font script="Geor" typeface="Sylfaen"/>
+      </a:minorFont>
+    </a:fontScheme>
+    <a:fmtScheme name="Office">
+      <a:fillStyleLst>
+        <a:solidFill>
+          <a:schemeClr val="phClr"/>
+        </a:solidFill>
+        <a:gradFill rotWithShape="1">
+          <a:gsLst>
+            <a:gs pos="0">
+              <a:schemeClr val="phClr">
+                <a:tint val="50000"/>
+                <a:satMod val="300000"/>
+              </a:schemeClr>
+            </a:gs>
+            <a:gs pos="35000">
+              <a:schemeClr val="phClr">
+                <a:tint val="37000"/>
+                <a:satMod val="300000"/>
+              </a:schemeClr>
+            </a:gs>
+            <a:gs pos="100000">
+              <a:schemeClr val="phClr">
+                <a:tint val="15000"/>
+                <a:satMod val="350000"/>
+              </a:schemeClr>
+            </a:gs>
+          </a:gsLst>
+          <a:lin ang="16200000" scaled="1"/>
+        </a:gradFill>
+        <a:gradFill rotWithShape="1">
+          <a:gsLst>
+            <a:gs pos="0">
+              <a:schemeClr val="phClr">
+                <a:tint val="100000"/>
+                <a:shade val="100000"/>
+                <a:satMod val="130000"/>
+              </a:schemeClr>
+            </a:gs>
+            <a:gs pos="100000">
+              <a:schemeClr val="phClr">
+                <a:tint val="50000"/>
+                <a:shade val="100000"/>
+                <a:satMod val="350000"/>
+              </a:schemeClr>
+            </a:gs>
+          </a:gsLst>
+          <a:lin ang="16200000" scaled="0"/>
+        </a:gradFill>
+      </a:fillStyleLst>
+      <a:lnStyleLst>
+        <a:ln w="9525" cap="flat" cmpd="sng" algn="ctr">
+          <a:solidFill>
+            <a:schemeClr val="phClr">
+              <a:shade val="95000"/>
+              <a:satMod val="105000"/>
+            </a:schemeClr>
+          </a:solidFill>
+          <a:prstDash val="solid"/>
+        </a:ln>
+        <a:ln w="25400" cap="flat" cmpd="sng" algn="ctr">
+          <a:solidFill>
+            <a:schemeClr val="phClr"/>
+          </a:solidFill>
+          <a:prstDash val="solid"/>
+        </a:ln>
+        <a:ln w="38100" cap="flat" cmpd="sng" algn="ctr">
+          <a:solidFill>
+            <a:schemeClr val="phClr"/>
+          </a:solidFill>
+          <a:prstDash val="solid"/>
+        </a:ln>
+      </a:lnStyleLst>
+      <a:effectStyleLst>
+        <a:effectStyle>
+          <a:effectLst>
+            <a:outerShdw blurRad="40000" dist="20000" dir="5400000" rotWithShape="0">
+              <a:srgbClr val="000000">
+                <a:alpha val="38000"/>
+              </a:srgbClr>
+            </a:outerShdw>
+          </a:effectLst>
+        </a:effectStyle>
+        <a:effectStyle>
+          <a:effectLst>
+            <a:outerShdw blurRad="40000" dist="23000" dir="5400000" rotWithShape="0">
+              <a:srgbClr val="000000">
+                <a:alpha val="35000"/>
+              </a:srgbClr>
+            </a:outerShdw>
+          </a:effectLst>
+        </a:effectStyle>
+        <a:effectStyle>
+          <a:effectLst>
+            <a:outerShdw blurRad="40000" dist="23000" dir="5400000" rotWithShape="0">
+              <a:srgbClr val="000000">
+                <a:alpha val="35000"/>
+              </a:srgbClr>
+            </a:outerShdw>
+          </a:effectLst>
+          <a:scene3d>
+            <a:camera prst="orthographicFront">
+              <a:rot lat="0" lon="0" rev="0"/>
+            </a:camera>
+            <a:lightRig rig="threePt" dir="t">
+              <a:rot lat="0" lon="0" rev="1200000"/>
+            </a:lightRig>
+          </a:scene3d>
+          <a:sp3d>
+            <a:bevelT w="63500" h="25400"/>
+          </a:sp3d>
+        </a:effectStyle>
+      </a:effectStyleLst>
+      <a:bgFillStyleLst>
+        <a:solidFill>
+          <a:schemeClr val="phClr"/>
+        </a:solidFill>
+        <a:gradFill rotWithShape="1">
+          <a:gsLst>
+            <a:gs pos="0">
+              <a:schemeClr val="phClr">
+                <a:tint val="40000"/>
+                <a:satMod val="350000"/>
+              </a:schemeClr>
+            </a:gs>
+            <a:gs pos="40000">
+              <a:schemeClr val="phClr">
+                <a:tint val="45000"/>
+                <a:shade val="99000"/>
+                <a:satMod val="350000"/>
+              </a:schemeClr>
+            </a:gs>
+            <a:gs pos="100000">
+              <a:schemeClr val="phClr">
+                <a:shade val="20000"/>
+                <a:satMod val="255000"/>
+              </a:schemeClr>
+            </a:gs>
+          </a:gsLst>
+          <a:path path="circle">
+            <a:fillToRect l="50000" t="-80000" r="50000" b="180000"/>
+          </a:path>
+        </a:gradFill>
+        <a:gradFill rotWithShape="1">
+          <a:gsLst>
+            <a:gs pos="0">
+              <a:schemeClr val="phClr">
+                <a:tint val="80000"/>
+                <a:satMod val="300000"/>
+              </a:schemeClr>
+            </a:gs>
+            <a:gs pos="100000">
+              <a:schemeClr val="phClr">
+                <a:shade val="30000"/>
+                <a:satMod val="200000"/>
+              </a:schemeClr>
+            </a:gs>
+          </a:gsLst>
+          <a:path path="circle">
+            <a:fillToRect l="50000" t="50000" r="50000" b="50000"/>
+          </a:path>
+        </a:gradFill>
+      </a:bgFillStyleLst>
+    </a:fmtScheme>
+  </a:themeElements>
+  <a:objectDefaults>
+    <a:spDef>
+      <a:spPr/>
+      <a:bodyPr/>
+      <a:lstStyle/>
+      <a:style>
+        <a:lnRef idx="1">
+          <a:schemeClr val="accent1"/>
+        </a:lnRef>
+        <a:fillRef idx="3">
+          <a:schemeClr val="accent1"/>
+        </a:fillRef>
+        <a:effectRef idx="2">
+          <a:schemeClr val="accent1"/>
+        </a:effectRef>
+        <a:fontRef idx="minor">
+          <a:schemeClr val="lt1"/>
+        </a:fontRef>
+      </a:style>
+    </a:spDef>
+    <a:lnDef>
+      <a:spPr/>
+      <a:bodyPr/>
+      <a:lstStyle/>
+      <a:style>
+        <a:lnRef idx="2">
+          <a:schemeClr val="accent1"/>
+        </a:lnRef>
+        <a:fillRef idx="0">
+          <a:schemeClr val="accent1"/>
+        </a:fillRef>
+        <a:effectRef idx="1">
+          <a:schemeClr val="accent1"/>
+        </a:effectRef>
+        <a:fontRef idx="minor">
+          <a:schemeClr val="tx1"/>
+        </a:fontRef>
+      </a:style>
+    </a:lnDef>
+  </a:objectDefaults>
+  <a:extraClrSchemeLst/>
+</a:theme>
 </file>